--- a/3-Master_Plan/re_entry/HEROs_and_PASSes/slides/auto/CHAR_PD21_rho_hsort_calibrate_AUTO.pptx
+++ b/3-Master_Plan/re_entry/HEROs_and_PASSes/slides/auto/CHAR_PD21_rho_hsort_calibrate_AUTO.pptx
@@ -302,7 +302,7 @@
           <a:p>
             <a:fld id="{5BCAD085-E8A6-8845-BD4E-CB4CCA059FC4}" type="datetimeFigureOut">
               <a:rPr lang="en-US" smtClean="0"/>
-              <a:t>8/14/26</a:t>
+              <a:t>8/17/26</a:t>
             </a:fld>
             <a:endParaRPr lang="en-US"/>
           </a:p>
@@ -470,7 +470,7 @@
           <a:p>
             <a:fld id="{5BCAD085-E8A6-8845-BD4E-CB4CCA059FC4}" type="datetimeFigureOut">
               <a:rPr lang="en-US" smtClean="0"/>
-              <a:t>8/14/26</a:t>
+              <a:t>8/17/26</a:t>
             </a:fld>
             <a:endParaRPr lang="en-US"/>
           </a:p>
@@ -648,7 +648,7 @@
           <a:p>
             <a:fld id="{5BCAD085-E8A6-8845-BD4E-CB4CCA059FC4}" type="datetimeFigureOut">
               <a:rPr lang="en-US" smtClean="0"/>
-              <a:t>8/14/26</a:t>
+              <a:t>8/17/26</a:t>
             </a:fld>
             <a:endParaRPr lang="en-US"/>
           </a:p>
@@ -816,7 +816,7 @@
           <a:p>
             <a:fld id="{5BCAD085-E8A6-8845-BD4E-CB4CCA059FC4}" type="datetimeFigureOut">
               <a:rPr lang="en-US" smtClean="0"/>
-              <a:t>8/14/26</a:t>
+              <a:t>8/17/26</a:t>
             </a:fld>
             <a:endParaRPr lang="en-US"/>
           </a:p>
@@ -1061,7 +1061,7 @@
           <a:p>
             <a:fld id="{5BCAD085-E8A6-8845-BD4E-CB4CCA059FC4}" type="datetimeFigureOut">
               <a:rPr lang="en-US" smtClean="0"/>
-              <a:t>8/14/26</a:t>
+              <a:t>8/17/26</a:t>
             </a:fld>
             <a:endParaRPr lang="en-US"/>
           </a:p>
@@ -1346,7 +1346,7 @@
           <a:p>
             <a:fld id="{5BCAD085-E8A6-8845-BD4E-CB4CCA059FC4}" type="datetimeFigureOut">
               <a:rPr lang="en-US" smtClean="0"/>
-              <a:t>8/14/26</a:t>
+              <a:t>8/17/26</a:t>
             </a:fld>
             <a:endParaRPr lang="en-US"/>
           </a:p>
@@ -1765,7 +1765,7 @@
           <a:p>
             <a:fld id="{5BCAD085-E8A6-8845-BD4E-CB4CCA059FC4}" type="datetimeFigureOut">
               <a:rPr lang="en-US" smtClean="0"/>
-              <a:t>8/14/26</a:t>
+              <a:t>8/17/26</a:t>
             </a:fld>
             <a:endParaRPr lang="en-US"/>
           </a:p>
@@ -1882,7 +1882,7 @@
           <a:p>
             <a:fld id="{5BCAD085-E8A6-8845-BD4E-CB4CCA059FC4}" type="datetimeFigureOut">
               <a:rPr lang="en-US" smtClean="0"/>
-              <a:t>8/14/26</a:t>
+              <a:t>8/17/26</a:t>
             </a:fld>
             <a:endParaRPr lang="en-US"/>
           </a:p>
@@ -1977,7 +1977,7 @@
           <a:p>
             <a:fld id="{5BCAD085-E8A6-8845-BD4E-CB4CCA059FC4}" type="datetimeFigureOut">
               <a:rPr lang="en-US" smtClean="0"/>
-              <a:t>8/14/26</a:t>
+              <a:t>8/17/26</a:t>
             </a:fld>
             <a:endParaRPr lang="en-US"/>
           </a:p>
@@ -2252,7 +2252,7 @@
           <a:p>
             <a:fld id="{5BCAD085-E8A6-8845-BD4E-CB4CCA059FC4}" type="datetimeFigureOut">
               <a:rPr lang="en-US" smtClean="0"/>
-              <a:t>8/14/26</a:t>
+              <a:t>8/17/26</a:t>
             </a:fld>
             <a:endParaRPr lang="en-US"/>
           </a:p>
@@ -2504,7 +2504,7 @@
           <a:p>
             <a:fld id="{5BCAD085-E8A6-8845-BD4E-CB4CCA059FC4}" type="datetimeFigureOut">
               <a:rPr lang="en-US" smtClean="0"/>
-              <a:t>8/14/26</a:t>
+              <a:t>8/17/26</a:t>
             </a:fld>
             <a:endParaRPr lang="en-US"/>
           </a:p>
@@ -2715,7 +2715,7 @@
           <a:p>
             <a:fld id="{5BCAD085-E8A6-8845-BD4E-CB4CCA059FC4}" type="datetimeFigureOut">
               <a:rPr lang="en-US" smtClean="0"/>
-              <a:t>8/14/26</a:t>
+              <a:t>8/17/26</a:t>
             </a:fld>
             <a:endParaRPr lang="en-US"/>
           </a:p>
@@ -3090,30 +3090,6 @@
           <a:chExt cx="0" cy="0"/>
         </a:xfrm>
       </p:grpSpPr>
-      <p:pic>
-        <p:nvPicPr>
-          <p:cNvPr id="4" name="Picture 3" descr="PD21_rho_hsort_calibrate_2011_2021_bracket.png"/>
-          <p:cNvPicPr>
-            <a:picLocks noChangeAspect="1"/>
-          </p:cNvPicPr>
-          <p:nvPr/>
-        </p:nvPicPr>
-        <p:blipFill>
-          <a:blip r:embed="rId2"/>
-          <a:stretch>
-            <a:fillRect/>
-          </a:stretch>
-        </p:blipFill>
-        <p:spPr>
-          <a:xfrm>
-            <a:off x="3671407" y="721581"/>
-            <a:ext cx="8337713" cy="5423187"/>
-          </a:xfrm>
-          <a:prstGeom prst="rect">
-            <a:avLst/>
-          </a:prstGeom>
-        </p:spPr>
-      </p:pic>
       <mc:AlternateContent xmlns:mc="http://schemas.openxmlformats.org/markup-compatibility/2006">
         <mc:Choice xmlns:a14="http://schemas.microsoft.com/office/drawing/2010/main" Requires="a14">
           <p:sp>
@@ -3125,7 +3101,7 @@
             <p:spPr>
               <a:xfrm>
                 <a:off x="384048" y="219456"/>
-                <a:ext cx="6819944" cy="400110"/>
+                <a:ext cx="10413492" cy="400110"/>
               </a:xfrm>
               <a:prstGeom prst="rect">
                 <a:avLst/>
@@ -3155,30 +3131,24 @@
                   </m:oMath>
                 </a14:m>
                 <a:r>
-                  <a:rPr lang="en-US" sz="2000" b="1" i="0" baseline="0" dirty="0">
-                    <a:latin typeface="Calibri"/>
-                  </a:rPr>
-                  <a:t> </a:t>
-                </a:r>
-                <a:r>
                   <a:rPr sz="2000" b="1" i="0" baseline="0" dirty="0">
                     <a:latin typeface="Calibri"/>
                   </a:rPr>
-                  <a:t>to empirical sorting index </a:t>
+                  <a:t> to empirical sorting index </a:t>
                 </a:r>
                 <a14:m>
                   <m:oMath xmlns:m="http://schemas.openxmlformats.org/officeDocument/2006/math">
                     <m:sSub>
                       <m:sSubPr>
                         <m:ctrlPr>
-                          <a:rPr lang="en-US" sz="2000" b="1" i="0" baseline="0" dirty="0" smtClean="0">
+                          <a:rPr lang="en-US" sz="2000" b="1" i="0" baseline="0" dirty="0">
                             <a:latin typeface="Cambria Math" panose="02040503050406030204" pitchFamily="18" charset="0"/>
                           </a:rPr>
                         </m:ctrlPr>
                       </m:sSubPr>
                       <m:e>
                         <m:r>
-                          <a:rPr lang="en-US" sz="2000" b="1" i="0" baseline="0" dirty="0" smtClean="0">
+                          <a:rPr lang="en-US" sz="2000" b="1" i="0" baseline="0" dirty="0">
                             <a:latin typeface="Cambria Math" panose="02040503050406030204" pitchFamily="18" charset="0"/>
                           </a:rPr>
                           <m:t>𝐻</m:t>
@@ -3189,7 +3159,7 @@
                           <m:rPr>
                             <m:sty m:val="p"/>
                           </m:rPr>
-                          <a:rPr lang="en-US" sz="2000" b="1" i="0" baseline="0" dirty="0" smtClean="0">
+                          <a:rPr lang="en-US" sz="2000" b="1" i="0" baseline="0" dirty="0">
                             <a:latin typeface="Cambria Math" panose="02040503050406030204" pitchFamily="18" charset="0"/>
                           </a:rPr>
                           <m:t>sort</m:t>
@@ -3198,9 +3168,12 @@
                     </m:sSub>
                   </m:oMath>
                 </a14:m>
-                <a:endParaRPr sz="2000" b="1" i="0" baseline="0" dirty="0">
-                  <a:latin typeface="Calibri"/>
-                </a:endParaRPr>
+                <a:r>
+                  <a:rPr sz="2000" b="1" i="0" baseline="0" dirty="0">
+                    <a:latin typeface="Calibri"/>
+                  </a:rPr>
+                  <a:t> (hero panel — locked calibration)</a:t>
+                </a:r>
               </a:p>
             </p:txBody>
           </p:sp>
@@ -3217,15 +3190,15 @@
             <p:spPr>
               <a:xfrm>
                 <a:off x="384048" y="219456"/>
-                <a:ext cx="6819944" cy="400110"/>
+                <a:ext cx="10413492" cy="400110"/>
               </a:xfrm>
               <a:prstGeom prst="rect">
                 <a:avLst/>
               </a:prstGeom>
               <a:blipFill>
-                <a:blip r:embed="rId3"/>
+                <a:blip r:embed="rId2"/>
                 <a:stretch>
-                  <a:fillRect l="-929" t="-9375" b="-28125"/>
+                  <a:fillRect l="-609" t="-9375" b="-28125"/>
                 </a:stretch>
               </a:blipFill>
             </p:spPr>
@@ -3255,7 +3228,7 @@
             <p:spPr>
               <a:xfrm>
                 <a:off x="384048" y="713232"/>
-                <a:ext cx="5406929" cy="246221"/>
+                <a:ext cx="5721118" cy="246221"/>
               </a:xfrm>
               <a:prstGeom prst="rect">
                 <a:avLst/>
@@ -3272,19 +3245,29 @@
                   <a:rPr sz="1000" b="0" i="0" baseline="0" dirty="0">
                     <a:latin typeface="Calibri"/>
                   </a:rPr>
-                  <a:t>PD21 · LG ASSIGN calibration · 2011-2021 · 50 seeds · bracket </a:t>
+                  <a:t>PD21 · LG ASSIGN calibration · 2011-2021 · </a:t>
+                </a:r>
+                <a14:m>
+                  <m:oMath xmlns:m="http://schemas.openxmlformats.org/officeDocument/2006/math">
+                    <m:r>
+                      <a:rPr lang="en-US" sz="1000" b="0" i="0" baseline="0" dirty="0" smtClean="0">
+                        <a:latin typeface="Cambria Math" panose="02040503050406030204" pitchFamily="18" charset="0"/>
+                      </a:rPr>
+                      <m:t>50</m:t>
+                    </m:r>
+                  </m:oMath>
+                </a14:m>
+                <a:r>
+                  <a:rPr sz="1000" b="0" i="0" baseline="0" dirty="0">
+                    <a:latin typeface="Calibri"/>
+                  </a:rPr>
+                  <a:t> seeds · bracket </a:t>
                 </a:r>
                 <a:r>
                   <a:rPr sz="1000" b="0" i="0" baseline="0" dirty="0" err="1">
                     <a:latin typeface="Calibri"/>
                   </a:rPr>
                   <a:t>tol</a:t>
-                </a:r>
-                <a:r>
-                  <a:rPr lang="en-US" sz="1000" b="0" i="0" baseline="0" dirty="0">
-                    <a:latin typeface="Calibri"/>
-                  </a:rPr>
-                  <a:t> </a:t>
                 </a:r>
                 <a14:m>
                   <m:oMath xmlns:m="http://schemas.openxmlformats.org/officeDocument/2006/math">
@@ -3333,13 +3316,16 @@
                       <a:rPr lang="en-US" sz="1000" b="0" i="0" baseline="0" dirty="0">
                         <a:latin typeface="Cambria Math" panose="02040503050406030204" pitchFamily="18" charset="0"/>
                       </a:rPr>
-                      <m:t>≈0.0703</m:t>
+                      <m:t>≈0</m:t>
                     </m:r>
                   </m:oMath>
                 </a14:m>
-                <a:endParaRPr sz="1000" b="0" i="0" baseline="0" dirty="0">
-                  <a:latin typeface="Calibri"/>
-                </a:endParaRPr>
+                <a:r>
+                  <a:rPr sz="1000" b="0" i="0" baseline="0" dirty="0">
+                    <a:latin typeface="Calibri"/>
+                  </a:rPr>
+                  <a:t> · hero panel</a:t>
+                </a:r>
               </a:p>
             </p:txBody>
           </p:sp>
@@ -3356,13 +3342,13 @@
             <p:spPr>
               <a:xfrm>
                 <a:off x="384048" y="713232"/>
-                <a:ext cx="5406929" cy="246221"/>
+                <a:ext cx="5721118" cy="246221"/>
               </a:xfrm>
               <a:prstGeom prst="rect">
                 <a:avLst/>
               </a:prstGeom>
               <a:blipFill>
-                <a:blip r:embed="rId4"/>
+                <a:blip r:embed="rId3"/>
                 <a:stretch>
                   <a:fillRect b="-10000"/>
                 </a:stretch>
@@ -3383,6 +3369,30 @@
           </p:sp>
         </mc:Fallback>
       </mc:AlternateContent>
+      <p:pic>
+        <p:nvPicPr>
+          <p:cNvPr id="4" name="Picture 3" descr="PD21_rho_hsort_calibrate_2011_2021_bracket.png"/>
+          <p:cNvPicPr>
+            <a:picLocks noChangeAspect="1"/>
+          </p:cNvPicPr>
+          <p:nvPr/>
+        </p:nvPicPr>
+        <p:blipFill>
+          <a:blip r:embed="rId4"/>
+          <a:stretch>
+            <a:fillRect/>
+          </a:stretch>
+        </p:blipFill>
+        <p:spPr>
+          <a:xfrm>
+            <a:off x="4379976" y="1160349"/>
+            <a:ext cx="7653840" cy="4982550"/>
+          </a:xfrm>
+          <a:prstGeom prst="rect">
+            <a:avLst/>
+          </a:prstGeom>
+        </p:spPr>
+      </p:pic>
       <mc:AlternateContent xmlns:mc="http://schemas.openxmlformats.org/markup-compatibility/2006">
         <mc:Choice xmlns:a14="http://schemas.microsoft.com/office/drawing/2010/main" Requires="a14">
           <p:sp>
@@ -3393,8 +3403,8 @@
             </p:nvSpPr>
             <p:spPr>
               <a:xfrm>
-                <a:off x="182880" y="1053120"/>
-                <a:ext cx="2886323" cy="5296470"/>
+                <a:off x="283932" y="1199867"/>
+                <a:ext cx="4147904" cy="4481291"/>
               </a:xfrm>
               <a:prstGeom prst="rect">
                 <a:avLst/>
@@ -3402,15 +3412,23 @@
               <a:noFill/>
             </p:spPr>
             <p:txBody>
-              <a:bodyPr wrap="square" numCol="1">
-                <a:noAutofit/>
+              <a:bodyPr wrap="square">
+                <a:spAutoFit/>
               </a:bodyPr>
               <a:lstStyle/>
               <a:p>
                 <a:pPr>
-                  <a:lnSpc>
-                    <a:spcPct val="150000"/>
-                  </a:lnSpc>
+                  <a:buChar char="•"/>
+                </a:pPr>
+                <a:r>
+                  <a:rPr sz="1000" b="0" i="0" baseline="0" dirty="0">
+                    <a:latin typeface="Calibri"/>
+                  </a:rPr>
+                  <a:t>  PD21 locked calibration (Aug 2026): bracket search on hero panel for Alex ASSIGN $\rho$.</a:t>
+                </a:r>
+              </a:p>
+              <a:p>
+                <a:pPr>
                   <a:buChar char="•"/>
                 </a:pPr>
                 <a:r>
@@ -3492,23 +3510,33 @@
               </a:p>
               <a:p>
                 <a:pPr>
-                  <a:lnSpc>
-                    <a:spcPct val="150000"/>
-                  </a:lnSpc>
                   <a:buChar char="•"/>
                 </a:pPr>
                 <a:r>
                   <a:rPr sz="1000" b="0" i="0" baseline="0" dirty="0">
                     <a:latin typeface="Calibri"/>
                   </a:rPr>
-                  <a:t>  Panel: 2011–2021 hero MBB · min 20 min · empirical roster caps · PPM z within season.</a:t>
+                  <a:t>  Panel: 2011–2021 MBB · min</a:t>
+                </a:r>
+                <a14:m>
+                  <m:oMath xmlns:m="http://schemas.openxmlformats.org/officeDocument/2006/math">
+                    <m:r>
+                      <a:rPr lang="en-US" sz="1000" b="0" i="0" baseline="0" dirty="0" smtClean="0">
+                        <a:latin typeface="Cambria Math" panose="02040503050406030204" pitchFamily="18" charset="0"/>
+                      </a:rPr>
+                      <m:t>≥20</m:t>
+                    </m:r>
+                  </m:oMath>
+                </a14:m>
+                <a:r>
+                  <a:rPr sz="1000" b="0" i="0" baseline="0" dirty="0">
+                    <a:latin typeface="Calibri"/>
+                  </a:rPr>
+                  <a:t> min player-season drop · box QC at panel build · empirical roster caps · PPM z-scored within season.</a:t>
                 </a:r>
               </a:p>
               <a:p>
                 <a:pPr>
-                  <a:lnSpc>
-                    <a:spcPct val="150000"/>
-                  </a:lnSpc>
                   <a:buChar char="•"/>
                 </a:pPr>
                 <a:r>
@@ -3623,9 +3651,6 @@
               </a:p>
               <a:p>
                 <a:pPr>
-                  <a:lnSpc>
-                    <a:spcPct val="150000"/>
-                  </a:lnSpc>
                   <a:buChar char="•"/>
                 </a:pPr>
                 <a:r>
@@ -3948,9 +3973,6 @@
               </a:p>
               <a:p>
                 <a:pPr>
-                  <a:lnSpc>
-                    <a:spcPct val="150000"/>
-                  </a:lnSpc>
                   <a:buChar char="•"/>
                 </a:pPr>
                 <a:r>
@@ -3990,7 +4012,7 @@
                       <a:rPr lang="en-US" sz="1000" b="0" i="0" baseline="0" dirty="0">
                         <a:latin typeface="Cambria Math" panose="02040503050406030204" pitchFamily="18" charset="0"/>
                       </a:rPr>
-                      <m:t>≈0.07031</m:t>
+                      <m:t>≈0</m:t>
                     </m:r>
                   </m:oMath>
                 </a14:m>
@@ -4002,25 +4024,45 @@
                 </a:r>
                 <a14:m>
                   <m:oMath xmlns:m="http://schemas.openxmlformats.org/officeDocument/2006/math">
-                    <m:d>
-                      <m:dPr>
-                        <m:begChr m:val="|"/>
-                        <m:endChr m:val="|"/>
+                    <m:sSubSup>
+                      <m:sSubSupPr>
                         <m:ctrlPr>
                           <a:rPr lang="en-US" sz="1000" b="0" i="0" baseline="0" dirty="0">
                             <a:latin typeface="Cambria Math" panose="02040503050406030204" pitchFamily="18" charset="0"/>
                           </a:rPr>
                         </m:ctrlPr>
-                      </m:dPr>
+                      </m:sSubSupPr>
                       <m:e>
                         <m:r>
                           <a:rPr lang="en-US" sz="1000" b="0" i="0" baseline="0" dirty="0">
                             <a:latin typeface="Cambria Math" panose="02040503050406030204" pitchFamily="18" charset="0"/>
                           </a:rPr>
-                          <m:t>𝑒𝑟𝑟𝑜𝑟</m:t>
+                          <m:t>𝐻</m:t>
                         </m:r>
                       </m:e>
-                    </m:d>
+                      <m:sub>
+                        <m:r>
+                          <m:rPr>
+                            <m:sty m:val="p"/>
+                          </m:rPr>
+                          <a:rPr lang="en-US" sz="1000" b="0" i="0" baseline="0" dirty="0">
+                            <a:latin typeface="Cambria Math" panose="02040503050406030204" pitchFamily="18" charset="0"/>
+                          </a:rPr>
+                          <m:t>sort</m:t>
+                        </m:r>
+                      </m:sub>
+                      <m:sup>
+                        <m:r>
+                          <m:rPr>
+                            <m:sty m:val="p"/>
+                          </m:rPr>
+                          <a:rPr lang="en-US" sz="1000" b="0" i="0" baseline="0" dirty="0">
+                            <a:latin typeface="Cambria Math" panose="02040503050406030204" pitchFamily="18" charset="0"/>
+                          </a:rPr>
+                          <m:t>sim</m:t>
+                        </m:r>
+                      </m:sup>
+                    </m:sSubSup>
                   </m:oMath>
                 </a14:m>
                 <a:r>
@@ -4056,23 +4098,86 @@
                         </m:r>
                       </m:sup>
                     </m:sSup>
+                  </m:oMath>
+                </a14:m>
+                <a:r>
+                  <a:rPr sz="1000" b="0" i="0" baseline="0" dirty="0">
+                    <a:latin typeface="Calibri"/>
+                  </a:rPr>
+                  <a:t> </a:t>
+                </a:r>
+                <a14:m>
+                  <m:oMath xmlns:m="http://schemas.openxmlformats.org/officeDocument/2006/math">
                     <m:r>
                       <a:rPr lang="en-US" sz="1000" b="0" i="0" baseline="0" dirty="0" smtClean="0">
                         <a:latin typeface="Cambria Math" panose="02040503050406030204" pitchFamily="18" charset="0"/>
                       </a:rPr>
-                      <m:t>=1.5</m:t>
+                      <m:t>=0.082</m:t>
                     </m:r>
+                  </m:oMath>
+                </a14:m>
+                <a:r>
+                  <a:rPr sz="1000" b="0" i="0" baseline="0" dirty="0">
+                    <a:latin typeface="Calibri"/>
+                  </a:rPr>
+                  <a:t>; mean </a:t>
+                </a:r>
+                <a14:m>
+                  <m:oMath xmlns:m="http://schemas.openxmlformats.org/officeDocument/2006/math">
+                    <m:sSubSup>
+                      <m:sSubSupPr>
+                        <m:ctrlPr>
+                          <a:rPr lang="en-US" sz="1000" b="0" i="0" baseline="0" dirty="0">
+                            <a:latin typeface="Cambria Math" panose="02040503050406030204" pitchFamily="18" charset="0"/>
+                          </a:rPr>
+                        </m:ctrlPr>
+                      </m:sSubSupPr>
+                      <m:e>
+                        <m:r>
+                          <a:rPr lang="en-US" sz="1000" b="0" i="0" baseline="0" dirty="0">
+                            <a:latin typeface="Cambria Math" panose="02040503050406030204" pitchFamily="18" charset="0"/>
+                          </a:rPr>
+                          <m:t>𝐻</m:t>
+                        </m:r>
+                      </m:e>
+                      <m:sub>
+                        <m:r>
+                          <m:rPr>
+                            <m:sty m:val="p"/>
+                          </m:rPr>
+                          <a:rPr lang="en-US" sz="1000" b="0" i="0" baseline="0" dirty="0">
+                            <a:latin typeface="Cambria Math" panose="02040503050406030204" pitchFamily="18" charset="0"/>
+                          </a:rPr>
+                          <m:t>sort</m:t>
+                        </m:r>
+                      </m:sub>
+                      <m:sup>
+                        <m:r>
+                          <m:rPr>
+                            <m:sty m:val="p"/>
+                          </m:rPr>
+                          <a:rPr lang="en-US" sz="1000" b="0" i="0" baseline="0" dirty="0">
+                            <a:latin typeface="Cambria Math" panose="02040503050406030204" pitchFamily="18" charset="0"/>
+                          </a:rPr>
+                          <m:t>emp</m:t>
+                        </m:r>
+                      </m:sup>
+                    </m:sSubSup>
+                  </m:oMath>
+                </a14:m>
+                <a:r>
+                  <a:rPr sz="1000" b="0" i="0" baseline="0" dirty="0">
+                    <a:latin typeface="Calibri"/>
+                  </a:rPr>
+                  <a:t> </a:t>
+                </a:r>
+                <a14:m>
+                  <m:oMath xmlns:m="http://schemas.openxmlformats.org/officeDocument/2006/math">
                     <m:r>
                       <a:rPr lang="en-US" sz="1000" b="0" i="0" baseline="0" dirty="0" smtClean="0">
                         <a:latin typeface="Cambria Math" panose="02040503050406030204" pitchFamily="18" charset="0"/>
                       </a:rPr>
-                      <m:t>𝑒</m:t>
-                    </m:r>
-                    <m:r>
-                      <a:rPr lang="en-US" sz="1000" b="0" i="0" baseline="0" dirty="0" smtClean="0">
-                        <a:latin typeface="Cambria Math" panose="02040503050406030204" pitchFamily="18" charset="0"/>
-                      </a:rPr>
-                      <m:t>−05</m:t>
+                      <m:t>=0.064</m:t>
                     </m:r>
                   </m:oMath>
                 </a14:m>
@@ -4085,16 +4190,13 @@
               </a:p>
               <a:p>
                 <a:pPr>
-                  <a:lnSpc>
-                    <a:spcPct val="150000"/>
-                  </a:lnSpc>
                   <a:buChar char="•"/>
                 </a:pPr>
                 <a:r>
                   <a:rPr sz="1000" b="0" i="0" baseline="0" dirty="0">
                     <a:latin typeface="Calibri"/>
                   </a:rPr>
-                  <a:t>  Per-season: 6/11 seasons at </a:t>
+                  <a:t>  Per-season: 11/11 seasons at </a:t>
                 </a:r>
                 <a14:m>
                   <m:oMath xmlns:m="http://schemas.openxmlformats.org/officeDocument/2006/math">
@@ -4135,7 +4237,7 @@
                   <a:rPr sz="1000" b="0" i="0" baseline="0" dirty="0">
                     <a:latin typeface="Calibri"/>
                   </a:rPr>
-                  <a:t>; nonzero — 2013: </a:t>
+                  <a:t>; all at </a:t>
                 </a:r>
                 <a14:m>
                   <m:oMath xmlns:m="http://schemas.openxmlformats.org/officeDocument/2006/math">
@@ -4168,7 +4270,7 @@
                       <a:rPr lang="en-US" sz="1000" b="0" i="0" baseline="0" dirty="0">
                         <a:latin typeface="Cambria Math" panose="02040503050406030204" pitchFamily="18" charset="0"/>
                       </a:rPr>
-                      <m:t>≈0.0715</m:t>
+                      <m:t>=0</m:t>
                     </m:r>
                   </m:oMath>
                 </a14:m>
@@ -4176,175 +4278,11 @@
                   <a:rPr sz="1000" b="0" i="0" baseline="0" dirty="0">
                     <a:latin typeface="Calibri"/>
                   </a:rPr>
-                  <a:t>, 2015: </a:t>
-                </a:r>
-                <a14:m>
-                  <m:oMath xmlns:m="http://schemas.openxmlformats.org/officeDocument/2006/math">
-                    <m:sSup>
-                      <m:sSupPr>
-                        <m:ctrlPr>
-                          <a:rPr lang="en-US" sz="1000" b="0" i="0" baseline="0" dirty="0">
-                            <a:latin typeface="Cambria Math" panose="02040503050406030204" pitchFamily="18" charset="0"/>
-                          </a:rPr>
-                        </m:ctrlPr>
-                      </m:sSupPr>
-                      <m:e>
-                        <m:r>
-                          <a:rPr lang="en-US" sz="1000" b="0" i="0" baseline="0" dirty="0">
-                            <a:latin typeface="Cambria Math" panose="02040503050406030204" pitchFamily="18" charset="0"/>
-                          </a:rPr>
-                          <m:t>𝜌</m:t>
-                        </m:r>
-                      </m:e>
-                      <m:sup>
-                        <m:r>
-                          <a:rPr lang="en-US" sz="1000" b="0" i="0" baseline="0" dirty="0">
-                            <a:latin typeface="Cambria Math" panose="02040503050406030204" pitchFamily="18" charset="0"/>
-                          </a:rPr>
-                          <m:t>∗</m:t>
-                        </m:r>
-                      </m:sup>
-                    </m:sSup>
-                    <m:r>
-                      <a:rPr lang="en-US" sz="1000" b="0" i="0" baseline="0" dirty="0">
-                        <a:latin typeface="Cambria Math" panose="02040503050406030204" pitchFamily="18" charset="0"/>
-                      </a:rPr>
-                      <m:t>≈0.0668</m:t>
-                    </m:r>
-                  </m:oMath>
-                </a14:m>
-                <a:r>
-                  <a:rPr sz="1000" b="0" i="0" baseline="0" dirty="0">
-                    <a:latin typeface="Calibri"/>
-                  </a:rPr>
-                  <a:t>, 2018: </a:t>
-                </a:r>
-                <a14:m>
-                  <m:oMath xmlns:m="http://schemas.openxmlformats.org/officeDocument/2006/math">
-                    <m:sSup>
-                      <m:sSupPr>
-                        <m:ctrlPr>
-                          <a:rPr lang="en-US" sz="1000" b="0" i="0" baseline="0" dirty="0">
-                            <a:latin typeface="Cambria Math" panose="02040503050406030204" pitchFamily="18" charset="0"/>
-                          </a:rPr>
-                        </m:ctrlPr>
-                      </m:sSupPr>
-                      <m:e>
-                        <m:r>
-                          <a:rPr lang="en-US" sz="1000" b="0" i="0" baseline="0" dirty="0">
-                            <a:latin typeface="Cambria Math" panose="02040503050406030204" pitchFamily="18" charset="0"/>
-                          </a:rPr>
-                          <m:t>𝜌</m:t>
-                        </m:r>
-                      </m:e>
-                      <m:sup>
-                        <m:r>
-                          <a:rPr lang="en-US" sz="1000" b="0" i="0" baseline="0" dirty="0">
-                            <a:latin typeface="Cambria Math" panose="02040503050406030204" pitchFamily="18" charset="0"/>
-                          </a:rPr>
-                          <m:t>∗</m:t>
-                        </m:r>
-                      </m:sup>
-                    </m:sSup>
-                    <m:r>
-                      <a:rPr lang="en-US" sz="1000" b="0" i="0" baseline="0" dirty="0">
-                        <a:latin typeface="Cambria Math" panose="02040503050406030204" pitchFamily="18" charset="0"/>
-                      </a:rPr>
-                      <m:t>≈0.0168</m:t>
-                    </m:r>
-                  </m:oMath>
-                </a14:m>
-                <a:r>
-                  <a:rPr sz="1000" b="0" i="0" baseline="0" dirty="0">
-                    <a:latin typeface="Calibri"/>
-                  </a:rPr>
-                  <a:t>, 2019: </a:t>
-                </a:r>
-                <a14:m>
-                  <m:oMath xmlns:m="http://schemas.openxmlformats.org/officeDocument/2006/math">
-                    <m:sSup>
-                      <m:sSupPr>
-                        <m:ctrlPr>
-                          <a:rPr lang="en-US" sz="1000" b="0" i="0" baseline="0" dirty="0">
-                            <a:latin typeface="Cambria Math" panose="02040503050406030204" pitchFamily="18" charset="0"/>
-                          </a:rPr>
-                        </m:ctrlPr>
-                      </m:sSupPr>
-                      <m:e>
-                        <m:r>
-                          <a:rPr lang="en-US" sz="1000" b="0" i="0" baseline="0" dirty="0">
-                            <a:latin typeface="Cambria Math" panose="02040503050406030204" pitchFamily="18" charset="0"/>
-                          </a:rPr>
-                          <m:t>𝜌</m:t>
-                        </m:r>
-                      </m:e>
-                      <m:sup>
-                        <m:r>
-                          <a:rPr lang="en-US" sz="1000" b="0" i="0" baseline="0" dirty="0">
-                            <a:latin typeface="Cambria Math" panose="02040503050406030204" pitchFamily="18" charset="0"/>
-                          </a:rPr>
-                          <m:t>∗</m:t>
-                        </m:r>
-                      </m:sup>
-                    </m:sSup>
-                    <m:r>
-                      <a:rPr lang="en-US" sz="1000" b="0" i="0" baseline="0" dirty="0">
-                        <a:latin typeface="Cambria Math" panose="02040503050406030204" pitchFamily="18" charset="0"/>
-                      </a:rPr>
-                      <m:t>≈0.0293</m:t>
-                    </m:r>
-                  </m:oMath>
-                </a14:m>
-                <a:r>
-                  <a:rPr sz="1000" b="0" i="0" baseline="0" dirty="0">
-                    <a:latin typeface="Calibri"/>
-                  </a:rPr>
-                  <a:t>, 2021: </a:t>
-                </a:r>
-                <a14:m>
-                  <m:oMath xmlns:m="http://schemas.openxmlformats.org/officeDocument/2006/math">
-                    <m:sSup>
-                      <m:sSupPr>
-                        <m:ctrlPr>
-                          <a:rPr lang="en-US" sz="1000" b="0" i="0" baseline="0" dirty="0">
-                            <a:latin typeface="Cambria Math" panose="02040503050406030204" pitchFamily="18" charset="0"/>
-                          </a:rPr>
-                        </m:ctrlPr>
-                      </m:sSupPr>
-                      <m:e>
-                        <m:r>
-                          <a:rPr lang="en-US" sz="1000" b="0" i="0" baseline="0" dirty="0">
-                            <a:latin typeface="Cambria Math" panose="02040503050406030204" pitchFamily="18" charset="0"/>
-                          </a:rPr>
-                          <m:t>𝜌</m:t>
-                        </m:r>
-                      </m:e>
-                      <m:sup>
-                        <m:r>
-                          <a:rPr lang="en-US" sz="1000" b="0" i="0" baseline="0" dirty="0">
-                            <a:latin typeface="Cambria Math" panose="02040503050406030204" pitchFamily="18" charset="0"/>
-                          </a:rPr>
-                          <m:t>∗</m:t>
-                        </m:r>
-                      </m:sup>
-                    </m:sSup>
-                    <m:r>
-                      <a:rPr lang="en-US" sz="1000" b="0" i="0" baseline="0" dirty="0">
-                        <a:latin typeface="Cambria Math" panose="02040503050406030204" pitchFamily="18" charset="0"/>
-                      </a:rPr>
-                      <m:t>≈0.0652</m:t>
-                    </m:r>
-                  </m:oMath>
-                </a14:m>
-                <a:endParaRPr sz="1000" b="0" i="0" baseline="0" dirty="0">
-                  <a:latin typeface="Calibri"/>
-                </a:endParaRPr>
+                  <a:t>.</a:t>
+                </a:r>
               </a:p>
               <a:p>
                 <a:pPr>
-                  <a:lnSpc>
-                    <a:spcPct val="150000"/>
-                  </a:lnSpc>
                   <a:buChar char="•"/>
                 </a:pPr>
                 <a:r>
@@ -4400,7 +4338,7 @@
                       <a:rPr lang="en-US" sz="1000" b="0" i="0" baseline="0" dirty="0">
                         <a:latin typeface="Cambria Math" panose="02040503050406030204" pitchFamily="18" charset="0"/>
                       </a:rPr>
-                      <m:t>≈0.098</m:t>
+                      <m:t>≈0.112</m:t>
                     </m:r>
                   </m:oMath>
                 </a14:m>
@@ -4416,19 +4354,7 @@
                       <a:rPr lang="en-US" sz="1000" b="0" i="0" baseline="0" dirty="0" smtClean="0">
                         <a:latin typeface="Cambria Math" panose="02040503050406030204" pitchFamily="18" charset="0"/>
                       </a:rPr>
-                      <m:t>≈1.5</m:t>
-                    </m:r>
-                    <m:r>
-                      <a:rPr lang="en-US" sz="1000" b="0" i="0" baseline="0" dirty="0" smtClean="0">
-                        <a:latin typeface="Cambria Math" panose="02040503050406030204" pitchFamily="18" charset="0"/>
-                      </a:rPr>
-                      <m:t>𝑒</m:t>
-                    </m:r>
-                    <m:r>
-                      <a:rPr lang="en-US" sz="1000" b="0" i="0" baseline="0" dirty="0" smtClean="0">
-                        <a:latin typeface="Cambria Math" panose="02040503050406030204" pitchFamily="18" charset="0"/>
-                      </a:rPr>
-                      <m:t>−05</m:t>
+                      <m:t>≈0.018</m:t>
                     </m:r>
                   </m:oMath>
                 </a14:m>
@@ -4476,16 +4402,116 @@
               </a:p>
               <a:p>
                 <a:pPr>
-                  <a:lnSpc>
-                    <a:spcPct val="150000"/>
-                  </a:lnSpc>
                   <a:buChar char="•"/>
                 </a:pPr>
                 <a:r>
                   <a:rPr sz="1000" b="0" i="0" baseline="0" dirty="0">
                     <a:latin typeface="Calibri"/>
                   </a:rPr>
-                  <a:t>  VECTOR lock: </a:t>
+                  <a:t>  Figure bottom-right inset: per-season </a:t>
+                </a:r>
+                <a14:m>
+                  <m:oMath xmlns:m="http://schemas.openxmlformats.org/officeDocument/2006/math">
+                    <m:sSup>
+                      <m:sSupPr>
+                        <m:ctrlPr>
+                          <a:rPr lang="en-US" sz="1000" b="0" i="0" baseline="0" dirty="0">
+                            <a:latin typeface="Cambria Math" panose="02040503050406030204" pitchFamily="18" charset="0"/>
+                          </a:rPr>
+                        </m:ctrlPr>
+                      </m:sSupPr>
+                      <m:e>
+                        <m:r>
+                          <a:rPr lang="en-US" sz="1000" b="0" i="0" baseline="0" dirty="0">
+                            <a:latin typeface="Cambria Math" panose="02040503050406030204" pitchFamily="18" charset="0"/>
+                          </a:rPr>
+                          <m:t>𝜌</m:t>
+                        </m:r>
+                      </m:e>
+                      <m:sup>
+                        <m:r>
+                          <a:rPr lang="en-US" sz="1000" b="0" i="0" baseline="0" dirty="0">
+                            <a:latin typeface="Cambria Math" panose="02040503050406030204" pitchFamily="18" charset="0"/>
+                          </a:rPr>
+                          <m:t>∗</m:t>
+                        </m:r>
+                      </m:sup>
+                    </m:sSup>
+                  </m:oMath>
+                </a14:m>
+                <a:r>
+                  <a:rPr sz="1000" b="0" i="0" baseline="0" dirty="0">
+                    <a:latin typeface="Calibri"/>
+                  </a:rPr>
+                  <a:t> — flat at </a:t>
+                </a:r>
+                <a14:m>
+                  <m:oMath xmlns:m="http://schemas.openxmlformats.org/officeDocument/2006/math">
+                    <m:r>
+                      <a:rPr lang="en-US" sz="1000" b="0" i="0" baseline="0" dirty="0" smtClean="0">
+                        <a:latin typeface="Cambria Math" panose="02040503050406030204" pitchFamily="18" charset="0"/>
+                      </a:rPr>
+                      <m:t>0</m:t>
+                    </m:r>
+                  </m:oMath>
+                </a14:m>
+                <a:r>
+                  <a:rPr sz="1000" b="0" i="0" baseline="0" dirty="0">
+                    <a:latin typeface="Calibri"/>
+                  </a:rPr>
+                  <a:t> all seasons on hero panel.</a:t>
+                </a:r>
+              </a:p>
+              <a:p>
+                <a:pPr>
+                  <a:buChar char="•"/>
+                </a:pPr>
+                <a:r>
+                  <a:rPr sz="1000" b="0" i="0" baseline="0" dirty="0">
+                    <a:latin typeface="Calibri"/>
+                  </a:rPr>
+                  <a:t>  </a:t>
+                </a:r>
+                <a14:m>
+                  <m:oMath xmlns:m="http://schemas.openxmlformats.org/officeDocument/2006/math">
+                    <m:sSup>
+                      <m:sSupPr>
+                        <m:ctrlPr>
+                          <a:rPr lang="en-US" sz="1000" b="0" i="0" baseline="0" dirty="0">
+                            <a:latin typeface="Cambria Math" panose="02040503050406030204" pitchFamily="18" charset="0"/>
+                          </a:rPr>
+                        </m:ctrlPr>
+                      </m:sSupPr>
+                      <m:e>
+                        <m:r>
+                          <a:rPr lang="en-US" sz="1000" b="0" i="0" baseline="0" dirty="0">
+                            <a:latin typeface="Cambria Math" panose="02040503050406030204" pitchFamily="18" charset="0"/>
+                          </a:rPr>
+                          <m:t>𝜌</m:t>
+                        </m:r>
+                      </m:e>
+                      <m:sup>
+                        <m:r>
+                          <a:rPr lang="en-US" sz="1000" b="0" i="0" baseline="0" dirty="0">
+                            <a:latin typeface="Cambria Math" panose="02040503050406030204" pitchFamily="18" charset="0"/>
+                          </a:rPr>
+                          <m:t>∗</m:t>
+                        </m:r>
+                      </m:sup>
+                    </m:sSup>
+                    <m:r>
+                      <a:rPr lang="en-US" sz="1000" b="0" i="0" baseline="0" dirty="0">
+                        <a:latin typeface="Cambria Math" panose="02040503050406030204" pitchFamily="18" charset="0"/>
+                      </a:rPr>
+                      <m:t>=0</m:t>
+                    </m:r>
+                  </m:oMath>
+                </a14:m>
+                <a:r>
+                  <a:rPr sz="1000" b="0" i="0" baseline="0" dirty="0">
+                    <a:latin typeface="Calibri"/>
+                  </a:rPr>
+                  <a:t> — what we DO say: on the locked hero panel, the LG ASSIGN homophily knob calibrates to zero (11/11 seasons); empirical </a:t>
                 </a:r>
                 <a14:m>
                   <m:oMath xmlns:m="http://schemas.openxmlformats.org/officeDocument/2006/math">
@@ -4507,20 +4533,125 @@
                       </m:e>
                       <m:sub>
                         <m:r>
-                          <a:rPr lang="en-US" sz="1000" b="0" i="0" baseline="0" dirty="0">
-                            <a:latin typeface="Cambria Math" panose="02040503050406030204" pitchFamily="18" charset="0"/>
-                          </a:rPr>
-                          <m:t>𝑠𝑜𝑟𝑡</m:t>
+                          <m:rPr>
+                            <m:sty m:val="p"/>
+                          </m:rPr>
+                          <a:rPr lang="en-US" sz="1000" b="0" i="0" baseline="0" dirty="0">
+                            <a:latin typeface="Cambria Math" panose="02040503050406030204" pitchFamily="18" charset="0"/>
+                          </a:rPr>
+                          <m:t>sort</m:t>
                         </m:r>
                       </m:sub>
                     </m:sSub>
+                    <m:r>
+                      <a:rPr lang="en-US" sz="1000" b="0" i="0" baseline="0" dirty="0">
+                        <a:latin typeface="Cambria Math" panose="02040503050406030204" pitchFamily="18" charset="0"/>
+                      </a:rPr>
+                      <m:t>≈0.064</m:t>
+                    </m:r>
                   </m:oMath>
                 </a14:m>
                 <a:r>
                   <a:rPr sz="1000" b="0" i="0" baseline="0" dirty="0">
                     <a:latin typeface="Calibri"/>
                   </a:rPr>
-                  <a:t> is realized sorting — not the generative homophily knob </a:t>
+                  <a:t> (</a:t>
+                </a:r>
+                <a14:m>
+                  <m:oMath xmlns:m="http://schemas.openxmlformats.org/officeDocument/2006/math">
+                    <m:r>
+                      <a:rPr lang="en-US" sz="1000" b="0" i="0" baseline="0" dirty="0" smtClean="0">
+                        <a:latin typeface="Cambria Math" panose="02040503050406030204" pitchFamily="18" charset="0"/>
+                      </a:rPr>
+                      <m:t>≈0.0642059</m:t>
+                    </m:r>
+                  </m:oMath>
+                </a14:m>
+                <a:r>
+                  <a:rPr sz="1000" b="0" i="0" baseline="0" dirty="0">
+                    <a:latin typeface="Calibri"/>
+                  </a:rPr>
+                  <a:t> on </a:t>
+                </a:r>
+                <a14:m>
+                  <m:oMath xmlns:m="http://schemas.openxmlformats.org/officeDocument/2006/math">
+                    <m:d>
+                      <m:dPr>
+                        <m:begChr m:val="["/>
+                        <m:endChr m:val="]"/>
+                        <m:ctrlPr>
+                          <a:rPr lang="en-US" sz="1000" b="0" i="0" baseline="0" dirty="0">
+                            <a:latin typeface="Cambria Math" panose="02040503050406030204" pitchFamily="18" charset="0"/>
+                          </a:rPr>
+                        </m:ctrlPr>
+                      </m:dPr>
+                      <m:e>
+                        <m:r>
+                          <a:rPr lang="en-US" sz="1000" b="0" i="0" baseline="0" dirty="0">
+                            <a:latin typeface="Cambria Math" panose="02040503050406030204" pitchFamily="18" charset="0"/>
+                          </a:rPr>
+                          <m:t>0,1</m:t>
+                        </m:r>
+                      </m:e>
+                    </m:d>
+                  </m:oMath>
+                </a14:m>
+                <a:r>
+                  <a:rPr sz="1000" b="0" i="0" baseline="0" dirty="0">
+                    <a:latin typeface="Calibri"/>
+                  </a:rPr>
+                  <a:t> scale); sim at </a:t>
+                </a:r>
+                <a14:m>
+                  <m:oMath xmlns:m="http://schemas.openxmlformats.org/officeDocument/2006/math">
+                    <m:sSup>
+                      <m:sSupPr>
+                        <m:ctrlPr>
+                          <a:rPr lang="en-US" sz="1000" b="0" i="0" baseline="0" dirty="0">
+                            <a:latin typeface="Cambria Math" panose="02040503050406030204" pitchFamily="18" charset="0"/>
+                          </a:rPr>
+                        </m:ctrlPr>
+                      </m:sSupPr>
+                      <m:e>
+                        <m:r>
+                          <a:rPr lang="en-US" sz="1000" b="0" i="0" baseline="0" dirty="0">
+                            <a:latin typeface="Cambria Math" panose="02040503050406030204" pitchFamily="18" charset="0"/>
+                          </a:rPr>
+                          <m:t>𝜌</m:t>
+                        </m:r>
+                      </m:e>
+                      <m:sup>
+                        <m:r>
+                          <a:rPr lang="en-US" sz="1000" b="0" i="0" baseline="0" dirty="0">
+                            <a:latin typeface="Cambria Math" panose="02040503050406030204" pitchFamily="18" charset="0"/>
+                          </a:rPr>
+                          <m:t>∗</m:t>
+                        </m:r>
+                      </m:sup>
+                    </m:sSup>
+                  </m:oMath>
+                </a14:m>
+                <a:r>
+                  <a:rPr sz="1000" b="0" i="0" baseline="0" dirty="0">
+                    <a:latin typeface="Calibri"/>
+                  </a:rPr>
+                  <a:t> slightly high (</a:t>
+                </a:r>
+                <a14:m>
+                  <m:oMath xmlns:m="http://schemas.openxmlformats.org/officeDocument/2006/math">
+                    <m:r>
+                      <a:rPr lang="en-US" sz="1000" b="0" i="0" baseline="0" dirty="0" smtClean="0">
+                        <a:latin typeface="Cambria Math" panose="02040503050406030204" pitchFamily="18" charset="0"/>
+                      </a:rPr>
+                      <m:t>≈0.0821529</m:t>
+                    </m:r>
+                  </m:oMath>
+                </a14:m>
+                <a:r>
+                  <a:rPr sz="1000" b="0" i="0" baseline="0" dirty="0">
+                    <a:latin typeface="Calibri"/>
+                  </a:rPr>
+                  <a:t>); turning </a:t>
                 </a:r>
                 <a14:m>
                   <m:oMath xmlns:m="http://schemas.openxmlformats.org/officeDocument/2006/math">
@@ -4536,21 +4667,40 @@
                   <a:rPr sz="1000" b="0" i="0" baseline="0" dirty="0">
                     <a:latin typeface="Calibri"/>
                   </a:rPr>
-                  <a:t>.</a:t>
+                  <a:t> up overshoots (see legacy </a:t>
+                </a:r>
+                <a14:m>
+                  <m:oMath xmlns:m="http://schemas.openxmlformats.org/officeDocument/2006/math">
+                    <m:r>
+                      <a:rPr lang="en-US" sz="1000" b="0" i="0" baseline="0" dirty="0" smtClean="0">
+                        <a:latin typeface="Cambria Math" panose="02040503050406030204" pitchFamily="18" charset="0"/>
+                      </a:rPr>
+                      <m:t>𝜌</m:t>
+                    </m:r>
+                    <m:r>
+                      <a:rPr lang="en-US" sz="1000" b="0" i="0" baseline="0" dirty="0" smtClean="0">
+                        <a:latin typeface="Cambria Math" panose="02040503050406030204" pitchFamily="18" charset="0"/>
+                      </a:rPr>
+                      <m:t>=0.5</m:t>
+                    </m:r>
+                  </m:oMath>
+                </a14:m>
+                <a:r>
+                  <a:rPr sz="1000" b="0" i="0" baseline="0" dirty="0">
+                    <a:latin typeface="Calibri"/>
+                  </a:rPr>
+                  <a:t> bullet).</a:t>
                 </a:r>
               </a:p>
               <a:p>
                 <a:pPr>
-                  <a:lnSpc>
-                    <a:spcPct val="150000"/>
-                  </a:lnSpc>
                   <a:buChar char="•"/>
                 </a:pPr>
                 <a:r>
                   <a:rPr sz="1000" b="0" i="0" baseline="0" dirty="0">
                     <a:latin typeface="Calibri"/>
                   </a:rPr>
-                  <a:t>  Figure: small multiples — blue sim curve, red empirical line, green </a:t>
+                  <a:t>  </a:t>
                 </a:r>
                 <a14:m>
                   <m:oMath xmlns:m="http://schemas.openxmlformats.org/officeDocument/2006/math">
@@ -4579,13 +4729,84 @@
                         </m:r>
                       </m:sup>
                     </m:sSup>
+                    <m:r>
+                      <a:rPr lang="en-US" sz="1000" b="0" i="0" baseline="0" dirty="0">
+                        <a:latin typeface="Cambria Math" panose="02040503050406030204" pitchFamily="18" charset="0"/>
+                      </a:rPr>
+                      <m:t>=0</m:t>
+                    </m:r>
                   </m:oMath>
                 </a14:m>
                 <a:r>
                   <a:rPr sz="1000" b="0" i="0" baseline="0" dirty="0">
                     <a:latin typeface="Calibri"/>
                   </a:rPr>
-                  <a:t> (x-axis zoomed to evaluated bracket; reference </a:t>
+                  <a:t> — what we DO NOT say: NCAA has no team formation; Duke and a weak D-I school draw from the same talent pool; real-world assortativity is absent; Hero inverted-U / </a:t>
+                </a:r>
+                <a14:m>
+                  <m:oMath xmlns:m="http://schemas.openxmlformats.org/officeDocument/2006/math">
+                    <m:r>
+                      <a:rPr lang="en-US" sz="1000" b="0" i="0" baseline="0" dirty="0" smtClean="0">
+                        <a:latin typeface="Cambria Math" panose="02040503050406030204" pitchFamily="18" charset="0"/>
+                      </a:rPr>
+                      <m:t>𝜆</m:t>
+                    </m:r>
+                  </m:oMath>
+                </a14:m>
+                <a:r>
+                  <a:rPr sz="1000" b="0" i="0" baseline="0" dirty="0">
+                    <a:latin typeface="Calibri"/>
+                  </a:rPr>
+                  <a:t> / SELECT story is dead.</a:t>
+                </a:r>
+              </a:p>
+              <a:p>
+                <a:pPr>
+                  <a:buChar char="•"/>
+                </a:pPr>
+                <a:r>
+                  <a:rPr sz="1000" b="0" i="0" baseline="0" dirty="0">
+                    <a:latin typeface="Calibri"/>
+                  </a:rPr>
+                  <a:t>  </a:t>
+                </a:r>
+                <a14:m>
+                  <m:oMath xmlns:m="http://schemas.openxmlformats.org/officeDocument/2006/math">
+                    <m:sSub>
+                      <m:sSubPr>
+                        <m:ctrlPr>
+                          <a:rPr lang="en-US" sz="1000" b="0" i="0" baseline="0" dirty="0">
+                            <a:latin typeface="Cambria Math" panose="02040503050406030204" pitchFamily="18" charset="0"/>
+                          </a:rPr>
+                        </m:ctrlPr>
+                      </m:sSubPr>
+                      <m:e>
+                        <m:r>
+                          <a:rPr lang="en-US" sz="1000" b="0" i="0" baseline="0" dirty="0">
+                            <a:latin typeface="Cambria Math" panose="02040503050406030204" pitchFamily="18" charset="0"/>
+                          </a:rPr>
+                          <m:t>𝐻</m:t>
+                        </m:r>
+                      </m:e>
+                      <m:sub>
+                        <m:r>
+                          <m:rPr>
+                            <m:sty m:val="p"/>
+                          </m:rPr>
+                          <a:rPr lang="en-US" sz="1000" b="0" i="0" baseline="0" dirty="0">
+                            <a:latin typeface="Cambria Math" panose="02040503050406030204" pitchFamily="18" charset="0"/>
+                          </a:rPr>
+                          <m:t>sort</m:t>
+                        </m:r>
+                      </m:sub>
+                    </m:sSub>
+                  </m:oMath>
+                </a14:m>
+                <a:r>
+                  <a:rPr sz="1000" b="0" i="0" baseline="0" dirty="0">
+                    <a:latin typeface="Calibri"/>
+                  </a:rPr>
+                  <a:t> is realized sorting on a fixed roster partition (VECTOR lock) — not the generative </a:t>
                 </a:r>
                 <a14:m>
                   <m:oMath xmlns:m="http://schemas.openxmlformats.org/officeDocument/2006/math">
@@ -4601,7 +4822,231 @@
                   <a:rPr sz="1000" b="0" i="0" baseline="0" dirty="0">
                     <a:latin typeface="Calibri"/>
                   </a:rPr>
-                  <a:t> excluded from axis).</a:t>
+                  <a:t> knob. Box QC lowered measured </a:t>
+                </a:r>
+                <a14:m>
+                  <m:oMath xmlns:m="http://schemas.openxmlformats.org/officeDocument/2006/math">
+                    <m:sSub>
+                      <m:sSubPr>
+                        <m:ctrlPr>
+                          <a:rPr lang="en-US" sz="1000" b="0" i="0" baseline="0" dirty="0">
+                            <a:latin typeface="Cambria Math" panose="02040503050406030204" pitchFamily="18" charset="0"/>
+                          </a:rPr>
+                        </m:ctrlPr>
+                      </m:sSubPr>
+                      <m:e>
+                        <m:r>
+                          <a:rPr lang="en-US" sz="1000" b="0" i="0" baseline="0" dirty="0">
+                            <a:latin typeface="Cambria Math" panose="02040503050406030204" pitchFamily="18" charset="0"/>
+                          </a:rPr>
+                          <m:t>𝐻</m:t>
+                        </m:r>
+                      </m:e>
+                      <m:sub>
+                        <m:r>
+                          <m:rPr>
+                            <m:sty m:val="p"/>
+                          </m:rPr>
+                          <a:rPr lang="en-US" sz="1000" b="0" i="0" baseline="0" dirty="0">
+                            <a:latin typeface="Cambria Math" panose="02040503050406030204" pitchFamily="18" charset="0"/>
+                          </a:rPr>
+                          <m:t>sort</m:t>
+                        </m:r>
+                      </m:sub>
+                    </m:sSub>
+                  </m:oMath>
+                </a14:m>
+                <a:r>
+                  <a:rPr sz="1000" b="0" i="0" baseline="0" dirty="0">
+                    <a:latin typeface="Calibri"/>
+                  </a:rPr>
+                  <a:t> vs pre-QC (</a:t>
+                </a:r>
+                <a14:m>
+                  <m:oMath xmlns:m="http://schemas.openxmlformats.org/officeDocument/2006/math">
+                    <m:r>
+                      <a:rPr lang="en-US" sz="1000" b="0" i="0" baseline="0" dirty="0" smtClean="0">
+                        <a:latin typeface="Cambria Math" panose="02040503050406030204" pitchFamily="18" charset="0"/>
+                      </a:rPr>
+                      <m:t>∼0.10→∼0.06</m:t>
+                    </m:r>
+                  </m:oMath>
+                </a14:m>
+                <a:r>
+                  <a:rPr sz="1000" b="0" i="0" baseline="0" dirty="0">
+                    <a:latin typeface="Calibri"/>
+                  </a:rPr>
+                  <a:t>); modest </a:t>
+                </a:r>
+                <a14:m>
+                  <m:oMath xmlns:m="http://schemas.openxmlformats.org/officeDocument/2006/math">
+                    <m:r>
+                      <a:rPr lang="en-US" sz="1000" b="0" i="0" baseline="0" dirty="0" smtClean="0">
+                        <a:latin typeface="Cambria Math" panose="02040503050406030204" pitchFamily="18" charset="0"/>
+                      </a:rPr>
+                      <m:t>≠</m:t>
+                    </m:r>
+                  </m:oMath>
+                </a14:m>
+                <a:r>
+                  <a:rPr sz="1000" b="0" i="0" baseline="0" dirty="0">
+                    <a:latin typeface="Calibri"/>
+                  </a:rPr>
+                  <a:t> zero. Contrast: slide</a:t>
+                </a:r>
+                <a:r>
+                  <a:rPr lang="en-US" sz="1000" b="0" i="0" baseline="0" dirty="0">
+                    <a:latin typeface="Calibri"/>
+                  </a:rPr>
+                  <a:t> 6 </a:t>
+                </a:r>
+                <a:r>
+                  <a:rPr sz="1000" b="0" i="0" baseline="0" dirty="0">
+                    <a:latin typeface="Calibri"/>
+                  </a:rPr>
+                  <a:t> </a:t>
+                </a:r>
+                <a14:m>
+                  <m:oMath xmlns:m="http://schemas.openxmlformats.org/officeDocument/2006/math">
+                    <m:r>
+                      <a:rPr lang="en-US" sz="1000" b="0" i="0" baseline="0" dirty="0" smtClean="0">
+                        <a:latin typeface="Cambria Math" panose="02040503050406030204" pitchFamily="18" charset="0"/>
+                      </a:rPr>
+                      <m:t>𝑝𝑝𝑚</m:t>
+                    </m:r>
+                    <m:r>
+                      <a:rPr lang="en-US" sz="1000" b="0" i="0" baseline="0" dirty="0" smtClean="0">
+                        <a:latin typeface="Cambria Math" panose="02040503050406030204" pitchFamily="18" charset="0"/>
+                      </a:rPr>
+                      <m:t>0</m:t>
+                    </m:r>
+                    <m:r>
+                      <a:rPr lang="en-US" sz="1000" b="0" i="0" baseline="0" dirty="0" smtClean="0">
+                        <a:latin typeface="Cambria Math" panose="02040503050406030204" pitchFamily="18" charset="0"/>
+                      </a:rPr>
+                      <m:t>𝑙𝑡</m:t>
+                    </m:r>
+                    <m:r>
+                      <a:rPr lang="en-US" sz="1000" b="0" i="0" baseline="0" dirty="0" smtClean="0">
+                        <a:latin typeface="Cambria Math" panose="02040503050406030204" pitchFamily="18" charset="0"/>
+                      </a:rPr>
+                      <m:t>20</m:t>
+                    </m:r>
+                  </m:oMath>
+                </a14:m>
+                <a:r>
+                  <a:rPr sz="1000" b="0" i="0" baseline="0" dirty="0">
+                    <a:latin typeface="Calibri"/>
+                  </a:rPr>
+                  <a:t> panel.</a:t>
+                </a:r>
+              </a:p>
+              <a:p>
+                <a:pPr>
+                  <a:buChar char="•"/>
+                </a:pPr>
+                <a:r>
+                  <a:rPr sz="1000" b="0" i="0" baseline="0" dirty="0">
+                    <a:latin typeface="Calibri"/>
+                  </a:rPr>
+                  <a:t>  VECTOR lock: </a:t>
+                </a:r>
+                <a14:m>
+                  <m:oMath xmlns:m="http://schemas.openxmlformats.org/officeDocument/2006/math">
+                    <m:sSub>
+                      <m:sSubPr>
+                        <m:ctrlPr>
+                          <a:rPr lang="en-US" sz="1000" b="0" i="0" baseline="0" dirty="0">
+                            <a:latin typeface="Cambria Math" panose="02040503050406030204" pitchFamily="18" charset="0"/>
+                          </a:rPr>
+                        </m:ctrlPr>
+                      </m:sSubPr>
+                      <m:e>
+                        <m:r>
+                          <a:rPr lang="en-US" sz="1000" b="0" i="0" baseline="0" dirty="0">
+                            <a:latin typeface="Cambria Math" panose="02040503050406030204" pitchFamily="18" charset="0"/>
+                          </a:rPr>
+                          <m:t>𝐻</m:t>
+                        </m:r>
+                      </m:e>
+                      <m:sub>
+                        <m:r>
+                          <a:rPr lang="en-US" sz="1000" b="0" i="0" baseline="0" dirty="0">
+                            <a:latin typeface="Cambria Math" panose="02040503050406030204" pitchFamily="18" charset="0"/>
+                          </a:rPr>
+                          <m:t>𝑠𝑜𝑟𝑡</m:t>
+                        </m:r>
+                      </m:sub>
+                    </m:sSub>
+                  </m:oMath>
+                </a14:m>
+                <a:r>
+                  <a:rPr sz="1000" b="0" i="0" baseline="0" dirty="0">
+                    <a:latin typeface="Calibri"/>
+                  </a:rPr>
+                  <a:t> is realized sorting — not the generative homophily knob </a:t>
+                </a:r>
+                <a14:m>
+                  <m:oMath xmlns:m="http://schemas.openxmlformats.org/officeDocument/2006/math">
+                    <m:r>
+                      <a:rPr lang="en-US" sz="1000" b="0" i="0" baseline="0" dirty="0" smtClean="0">
+                        <a:latin typeface="Cambria Math" panose="02040503050406030204" pitchFamily="18" charset="0"/>
+                      </a:rPr>
+                      <m:t>𝜌</m:t>
+                    </m:r>
+                  </m:oMath>
+                </a14:m>
+                <a:r>
+                  <a:rPr sz="1000" b="0" i="0" baseline="0" dirty="0">
+                    <a:latin typeface="Calibri"/>
+                  </a:rPr>
+                  <a:t>.</a:t>
+                </a:r>
+              </a:p>
+              <a:p>
+                <a:pPr>
+                  <a:buChar char="•"/>
+                </a:pPr>
+                <a:r>
+                  <a:rPr sz="1000" b="0" i="0" baseline="0" dirty="0">
+                    <a:latin typeface="Calibri"/>
+                  </a:rPr>
+                  <a:t>  Figure: small multiples — blue sim curve, red empirical line, green </a:t>
+                </a:r>
+                <a14:m>
+                  <m:oMath xmlns:m="http://schemas.openxmlformats.org/officeDocument/2006/math">
+                    <m:sSup>
+                      <m:sSupPr>
+                        <m:ctrlPr>
+                          <a:rPr lang="en-US" sz="1000" b="0" i="0" baseline="0" dirty="0">
+                            <a:latin typeface="Cambria Math" panose="02040503050406030204" pitchFamily="18" charset="0"/>
+                          </a:rPr>
+                        </m:ctrlPr>
+                      </m:sSupPr>
+                      <m:e>
+                        <m:r>
+                          <a:rPr lang="en-US" sz="1000" b="0" i="0" baseline="0" dirty="0">
+                            <a:latin typeface="Cambria Math" panose="02040503050406030204" pitchFamily="18" charset="0"/>
+                          </a:rPr>
+                          <m:t>𝜌</m:t>
+                        </m:r>
+                      </m:e>
+                      <m:sup>
+                        <m:r>
+                          <a:rPr lang="en-US" sz="1000" b="0" i="0" baseline="0" dirty="0">
+                            <a:latin typeface="Cambria Math" panose="02040503050406030204" pitchFamily="18" charset="0"/>
+                          </a:rPr>
+                          <m:t>∗</m:t>
+                        </m:r>
+                      </m:sup>
+                    </m:sSup>
+                  </m:oMath>
+                </a14:m>
+                <a:r>
+                  <a:rPr sz="1000" b="0" i="0" baseline="0" dirty="0">
+                    <a:latin typeface="Calibri"/>
+                  </a:rPr>
+                  <a:t> (x-axis zoomed to evaluated bracket).</a:t>
                 </a:r>
               </a:p>
             </p:txBody>
@@ -4618,8 +5063,8 @@
             </p:nvSpPr>
             <p:spPr>
               <a:xfrm>
-                <a:off x="182880" y="1053120"/>
-                <a:ext cx="2886323" cy="5296470"/>
+                <a:off x="283932" y="1199867"/>
+                <a:ext cx="4147904" cy="4481291"/>
               </a:xfrm>
               <a:prstGeom prst="rect">
                 <a:avLst/>
@@ -4627,7 +5072,7 @@
               <a:blipFill>
                 <a:blip r:embed="rId5"/>
                 <a:stretch>
-                  <a:fillRect/>
+                  <a:fillRect t="-282"/>
                 </a:stretch>
               </a:blipFill>
             </p:spPr>
@@ -4656,8 +5101,8 @@
             </p:nvSpPr>
             <p:spPr>
               <a:xfrm>
-                <a:off x="384046" y="6349589"/>
-                <a:ext cx="11423599" cy="261610"/>
+                <a:off x="384048" y="6166786"/>
+                <a:ext cx="11423599" cy="430887"/>
               </a:xfrm>
               <a:prstGeom prst="rect">
                 <a:avLst/>
@@ -4675,15 +5120,40 @@
                   <a:rPr sz="1100" b="1" i="0" baseline="0" dirty="0">
                     <a:latin typeface="Calibri"/>
                   </a:rPr>
-                  <a:t>Claim (Alex): Near-zero ASSIGN homophily </a:t>
+                  <a:t>Claim (Alex): Hero panel — LG ASSIGN </a:t>
                 </a:r>
                 <a14:m>
                   <m:oMath xmlns:m="http://schemas.openxmlformats.org/officeDocument/2006/math">
+                    <m:sSup>
+                      <m:sSupPr>
+                        <m:ctrlPr>
+                          <a:rPr lang="en-US" sz="1100" b="1" i="0" baseline="0" dirty="0">
+                            <a:latin typeface="Cambria Math" panose="02040503050406030204" pitchFamily="18" charset="0"/>
+                          </a:rPr>
+                        </m:ctrlPr>
+                      </m:sSupPr>
+                      <m:e>
+                        <m:r>
+                          <a:rPr lang="en-US" sz="1100" b="1" i="0" baseline="0" dirty="0">
+                            <a:latin typeface="Cambria Math" panose="02040503050406030204" pitchFamily="18" charset="0"/>
+                          </a:rPr>
+                          <m:t>𝜌</m:t>
+                        </m:r>
+                      </m:e>
+                      <m:sup>
+                        <m:r>
+                          <a:rPr lang="en-US" sz="1100" b="1" i="0" baseline="0" dirty="0">
+                            <a:latin typeface="Cambria Math" panose="02040503050406030204" pitchFamily="18" charset="0"/>
+                          </a:rPr>
+                          <m:t>∗</m:t>
+                        </m:r>
+                      </m:sup>
+                    </m:sSup>
                     <m:r>
-                      <a:rPr lang="en-US" sz="1100" b="1" i="0" baseline="0" dirty="0" smtClean="0">
+                      <a:rPr lang="en-US" sz="1100" b="1" i="0" baseline="0" dirty="0">
                         <a:latin typeface="Cambria Math" panose="02040503050406030204" pitchFamily="18" charset="0"/>
                       </a:rPr>
-                      <m:t>𝜌</m:t>
+                      <m:t>=0</m:t>
                     </m:r>
                   </m:oMath>
                 </a14:m>
@@ -4691,7 +5161,7 @@
                   <a:rPr sz="1100" b="1" i="0" baseline="0" dirty="0">
                     <a:latin typeface="Calibri"/>
                   </a:rPr>
-                  <a:t> matches empirical </a:t>
+                  <a:t> matches modest empirical </a:t>
                 </a:r>
                 <a14:m>
                   <m:oMath xmlns:m="http://schemas.openxmlformats.org/officeDocument/2006/math">
@@ -4723,13 +5193,19 @@
                         </m:r>
                       </m:sub>
                     </m:sSub>
+                    <m:r>
+                      <a:rPr lang="en-US" sz="1100" b="1" i="0" baseline="0" dirty="0">
+                        <a:latin typeface="Cambria Math" panose="02040503050406030204" pitchFamily="18" charset="0"/>
+                      </a:rPr>
+                      <m:t>≈0.064</m:t>
+                    </m:r>
                   </m:oMath>
                 </a14:m>
                 <a:r>
                   <a:rPr sz="1100" b="1" i="0" baseline="0" dirty="0">
                     <a:latin typeface="Calibri"/>
                   </a:rPr>
-                  <a:t> on the hero panel — legacy </a:t>
+                  <a:t>; legacy </a:t>
                 </a:r>
                 <a14:m>
                   <m:oMath xmlns:m="http://schemas.openxmlformats.org/officeDocument/2006/math">
@@ -4751,7 +5227,7 @@
                   <a:rPr sz="1100" b="1" i="0" baseline="0" dirty="0">
                     <a:latin typeface="Calibri"/>
                   </a:rPr>
-                  <a:t> overshoots simulated sorting by </a:t>
+                  <a:t> overshoots (</a:t>
                 </a:r>
                 <a14:m>
                   <m:oMath xmlns:m="http://schemas.openxmlformats.org/officeDocument/2006/math">
@@ -4759,7 +5235,7 @@
                       <a:rPr lang="en-US" sz="1100" b="1" i="0" baseline="0" dirty="0" smtClean="0">
                         <a:latin typeface="Cambria Math" panose="02040503050406030204" pitchFamily="18" charset="0"/>
                       </a:rPr>
-                      <m:t>∼0.10</m:t>
+                      <m:t>0.11</m:t>
                     </m:r>
                   </m:oMath>
                 </a14:m>
@@ -4767,7 +5243,36 @@
                   <a:rPr sz="1100" b="1" i="0" baseline="0" dirty="0">
                     <a:latin typeface="Calibri"/>
                   </a:rPr>
-                  <a:t>.</a:t>
+                  <a:t> mean </a:t>
+                </a:r>
+                <a14:m>
+                  <m:oMath xmlns:m="http://schemas.openxmlformats.org/officeDocument/2006/math">
+                    <m:d>
+                      <m:dPr>
+                        <m:begChr m:val="|"/>
+                        <m:endChr m:val="|"/>
+                        <m:ctrlPr>
+                          <a:rPr lang="en-US" sz="1100" b="1" i="0" baseline="0" dirty="0">
+                            <a:latin typeface="Cambria Math" panose="02040503050406030204" pitchFamily="18" charset="0"/>
+                          </a:rPr>
+                        </m:ctrlPr>
+                      </m:dPr>
+                      <m:e>
+                        <m:r>
+                          <a:rPr lang="en-US" sz="1100" b="1" i="0" baseline="0" dirty="0">
+                            <a:latin typeface="Cambria Math" panose="02040503050406030204" pitchFamily="18" charset="0"/>
+                          </a:rPr>
+                          <m:t>𝑒𝑟𝑟𝑜𝑟</m:t>
+                        </m:r>
+                      </m:e>
+                    </m:d>
+                  </m:oMath>
+                </a14:m>
+                <a:r>
+                  <a:rPr sz="1100" b="1" i="0" baseline="0" dirty="0">
+                    <a:latin typeface="Calibri"/>
+                  </a:rPr>
+                  <a:t>). Model–measurement fit on this panel — not a claim that NCAA rosters are random.</a:t>
                 </a:r>
               </a:p>
             </p:txBody>
@@ -4784,8 +5289,8 @@
             </p:nvSpPr>
             <p:spPr>
               <a:xfrm>
-                <a:off x="384046" y="6349589"/>
-                <a:ext cx="11423599" cy="261610"/>
+                <a:off x="384048" y="6166786"/>
+                <a:ext cx="11423599" cy="430887"/>
               </a:xfrm>
               <a:prstGeom prst="rect">
                 <a:avLst/>
@@ -4793,7 +5298,7 @@
               <a:blipFill>
                 <a:blip r:embed="rId6"/>
                 <a:stretch>
-                  <a:fillRect b="-14286"/>
+                  <a:fillRect b="-5714"/>
                 </a:stretch>
               </a:blipFill>
             </p:spPr>

--- a/3-Master_Plan/re_entry/HEROs_and_PASSes/slides/auto/CHAR_PD21_rho_hsort_calibrate_AUTO.pptx
+++ b/3-Master_Plan/re_entry/HEROs_and_PASSes/slides/auto/CHAR_PD21_rho_hsort_calibrate_AUTO.pptx
@@ -5,9 +5,9 @@
     <p:sldMasterId id="2147483648" r:id="rId1"/>
   </p:sldMasterIdLst>
   <p:sldIdLst>
-    <p:sldId id="256" r:id="rId2"/>
+    <p:sldId id="256" r:id="rId7"/>
   </p:sldIdLst>
-  <p:sldSz cx="12192000" cy="6858000"/>
+  <p:sldSz cx="12191695" cy="6858000" type="screen4x3"/>
   <p:notesSz cx="6858000" cy="9144000"/>
   <p:defaultTextStyle>
     <a:defPPr>
@@ -104,22 +104,6 @@
       </a:defRPr>
     </a:lvl9pPr>
   </p:defaultTextStyle>
-  <p:extLst>
-    <p:ext uri="{EFAFB233-063F-42B5-8137-9DF3F51BA10A}">
-      <p15:sldGuideLst xmlns:p15="http://schemas.microsoft.com/office/powerpoint/2012/main">
-        <p15:guide id="1" orient="horz" pos="2160">
-          <p15:clr>
-            <a:srgbClr val="A4A3A4"/>
-          </p15:clr>
-        </p15:guide>
-        <p15:guide id="2" pos="2880">
-          <p15:clr>
-            <a:srgbClr val="A4A3A4"/>
-          </p15:clr>
-        </p15:guide>
-      </p15:sldGuideLst>
-    </p:ext>
-  </p:extLst>
 </p:presentation>
 </file>
 
@@ -161,9 +145,10 @@
           <a:lstStyle/>
           <a:p>
             <a:r>
-              <a:rPr lang="en-US"/>
+              <a:rPr lang="en-US" smtClean="0"/>
               <a:t>Click to edit Master title style</a:t>
             </a:r>
+            <a:endParaRPr lang="en-US"/>
           </a:p>
         </p:txBody>
       </p:sp>
@@ -279,9 +264,10 @@
           </a:lstStyle>
           <a:p>
             <a:r>
-              <a:rPr lang="en-US"/>
+              <a:rPr lang="en-US" smtClean="0"/>
               <a:t>Click to edit Master subtitle style</a:t>
             </a:r>
+            <a:endParaRPr lang="en-US"/>
           </a:p>
         </p:txBody>
       </p:sp>
@@ -302,7 +288,7 @@
           <a:p>
             <a:fld id="{5BCAD085-E8A6-8845-BD4E-CB4CCA059FC4}" type="datetimeFigureOut">
               <a:rPr lang="en-US" smtClean="0"/>
-              <a:t>8/17/26</a:t>
+              <a:t>1/27/13</a:t>
             </a:fld>
             <a:endParaRPr lang="en-US"/>
           </a:p>
@@ -396,9 +382,10 @@
           <a:lstStyle/>
           <a:p>
             <a:r>
-              <a:rPr lang="en-US"/>
+              <a:rPr lang="en-US" smtClean="0"/>
               <a:t>Click to edit Master title style</a:t>
             </a:r>
+            <a:endParaRPr lang="en-US"/>
           </a:p>
         </p:txBody>
       </p:sp>
@@ -419,37 +406,38 @@
           <a:p>
             <a:pPr lvl="0"/>
             <a:r>
-              <a:rPr lang="en-US"/>
+              <a:rPr lang="en-US" smtClean="0"/>
               <a:t>Click to edit Master text styles</a:t>
             </a:r>
           </a:p>
           <a:p>
             <a:pPr lvl="1"/>
             <a:r>
-              <a:rPr lang="en-US"/>
+              <a:rPr lang="en-US" smtClean="0"/>
               <a:t>Second level</a:t>
             </a:r>
           </a:p>
           <a:p>
             <a:pPr lvl="2"/>
             <a:r>
-              <a:rPr lang="en-US"/>
+              <a:rPr lang="en-US" smtClean="0"/>
               <a:t>Third level</a:t>
             </a:r>
           </a:p>
           <a:p>
             <a:pPr lvl="3"/>
             <a:r>
-              <a:rPr lang="en-US"/>
+              <a:rPr lang="en-US" smtClean="0"/>
               <a:t>Fourth level</a:t>
             </a:r>
           </a:p>
           <a:p>
             <a:pPr lvl="4"/>
             <a:r>
-              <a:rPr lang="en-US"/>
+              <a:rPr lang="en-US" smtClean="0"/>
               <a:t>Fifth level</a:t>
             </a:r>
+            <a:endParaRPr lang="en-US"/>
           </a:p>
         </p:txBody>
       </p:sp>
@@ -470,7 +458,7 @@
           <a:p>
             <a:fld id="{5BCAD085-E8A6-8845-BD4E-CB4CCA059FC4}" type="datetimeFigureOut">
               <a:rPr lang="en-US" smtClean="0"/>
-              <a:t>8/17/26</a:t>
+              <a:t>1/27/13</a:t>
             </a:fld>
             <a:endParaRPr lang="en-US"/>
           </a:p>
@@ -569,9 +557,10 @@
           <a:lstStyle/>
           <a:p>
             <a:r>
-              <a:rPr lang="en-US"/>
+              <a:rPr lang="en-US" smtClean="0"/>
               <a:t>Click to edit Master title style</a:t>
             </a:r>
+            <a:endParaRPr lang="en-US"/>
           </a:p>
         </p:txBody>
       </p:sp>
@@ -597,37 +586,38 @@
           <a:p>
             <a:pPr lvl="0"/>
             <a:r>
-              <a:rPr lang="en-US"/>
+              <a:rPr lang="en-US" smtClean="0"/>
               <a:t>Click to edit Master text styles</a:t>
             </a:r>
           </a:p>
           <a:p>
             <a:pPr lvl="1"/>
             <a:r>
-              <a:rPr lang="en-US"/>
+              <a:rPr lang="en-US" smtClean="0"/>
               <a:t>Second level</a:t>
             </a:r>
           </a:p>
           <a:p>
             <a:pPr lvl="2"/>
             <a:r>
-              <a:rPr lang="en-US"/>
+              <a:rPr lang="en-US" smtClean="0"/>
               <a:t>Third level</a:t>
             </a:r>
           </a:p>
           <a:p>
             <a:pPr lvl="3"/>
             <a:r>
-              <a:rPr lang="en-US"/>
+              <a:rPr lang="en-US" smtClean="0"/>
               <a:t>Fourth level</a:t>
             </a:r>
           </a:p>
           <a:p>
             <a:pPr lvl="4"/>
             <a:r>
-              <a:rPr lang="en-US"/>
+              <a:rPr lang="en-US" smtClean="0"/>
               <a:t>Fifth level</a:t>
             </a:r>
+            <a:endParaRPr lang="en-US"/>
           </a:p>
         </p:txBody>
       </p:sp>
@@ -648,7 +638,7 @@
           <a:p>
             <a:fld id="{5BCAD085-E8A6-8845-BD4E-CB4CCA059FC4}" type="datetimeFigureOut">
               <a:rPr lang="en-US" smtClean="0"/>
-              <a:t>8/17/26</a:t>
+              <a:t>1/27/13</a:t>
             </a:fld>
             <a:endParaRPr lang="en-US"/>
           </a:p>
@@ -742,9 +732,10 @@
           <a:lstStyle/>
           <a:p>
             <a:r>
-              <a:rPr lang="en-US"/>
+              <a:rPr lang="en-US" smtClean="0"/>
               <a:t>Click to edit Master title style</a:t>
             </a:r>
+            <a:endParaRPr lang="en-US"/>
           </a:p>
         </p:txBody>
       </p:sp>
@@ -765,37 +756,38 @@
           <a:p>
             <a:pPr lvl="0"/>
             <a:r>
-              <a:rPr lang="en-US"/>
+              <a:rPr lang="en-US" smtClean="0"/>
               <a:t>Click to edit Master text styles</a:t>
             </a:r>
           </a:p>
           <a:p>
             <a:pPr lvl="1"/>
             <a:r>
-              <a:rPr lang="en-US"/>
+              <a:rPr lang="en-US" smtClean="0"/>
               <a:t>Second level</a:t>
             </a:r>
           </a:p>
           <a:p>
             <a:pPr lvl="2"/>
             <a:r>
-              <a:rPr lang="en-US"/>
+              <a:rPr lang="en-US" smtClean="0"/>
               <a:t>Third level</a:t>
             </a:r>
           </a:p>
           <a:p>
             <a:pPr lvl="3"/>
             <a:r>
-              <a:rPr lang="en-US"/>
+              <a:rPr lang="en-US" smtClean="0"/>
               <a:t>Fourth level</a:t>
             </a:r>
           </a:p>
           <a:p>
             <a:pPr lvl="4"/>
             <a:r>
-              <a:rPr lang="en-US"/>
+              <a:rPr lang="en-US" smtClean="0"/>
               <a:t>Fifth level</a:t>
             </a:r>
+            <a:endParaRPr lang="en-US"/>
           </a:p>
         </p:txBody>
       </p:sp>
@@ -816,7 +808,7 @@
           <a:p>
             <a:fld id="{5BCAD085-E8A6-8845-BD4E-CB4CCA059FC4}" type="datetimeFigureOut">
               <a:rPr lang="en-US" smtClean="0"/>
-              <a:t>8/17/26</a:t>
+              <a:t>1/27/13</a:t>
             </a:fld>
             <a:endParaRPr lang="en-US"/>
           </a:p>
@@ -919,9 +911,10 @@
           </a:lstStyle>
           <a:p>
             <a:r>
-              <a:rPr lang="en-US"/>
+              <a:rPr lang="en-US" smtClean="0"/>
               <a:t>Click to edit Master title style</a:t>
             </a:r>
+            <a:endParaRPr lang="en-US"/>
           </a:p>
         </p:txBody>
       </p:sp>
@@ -1038,7 +1031,7 @@
           <a:p>
             <a:pPr lvl="0"/>
             <a:r>
-              <a:rPr lang="en-US"/>
+              <a:rPr lang="en-US" smtClean="0"/>
               <a:t>Click to edit Master text styles</a:t>
             </a:r>
           </a:p>
@@ -1061,7 +1054,7 @@
           <a:p>
             <a:fld id="{5BCAD085-E8A6-8845-BD4E-CB4CCA059FC4}" type="datetimeFigureOut">
               <a:rPr lang="en-US" smtClean="0"/>
-              <a:t>8/17/26</a:t>
+              <a:t>1/27/13</a:t>
             </a:fld>
             <a:endParaRPr lang="en-US"/>
           </a:p>
@@ -1155,9 +1148,10 @@
           <a:lstStyle/>
           <a:p>
             <a:r>
-              <a:rPr lang="en-US"/>
+              <a:rPr lang="en-US" smtClean="0"/>
               <a:t>Click to edit Master title style</a:t>
             </a:r>
+            <a:endParaRPr lang="en-US"/>
           </a:p>
         </p:txBody>
       </p:sp>
@@ -1211,37 +1205,38 @@
           <a:p>
             <a:pPr lvl="0"/>
             <a:r>
-              <a:rPr lang="en-US"/>
+              <a:rPr lang="en-US" smtClean="0"/>
               <a:t>Click to edit Master text styles</a:t>
             </a:r>
           </a:p>
           <a:p>
             <a:pPr lvl="1"/>
             <a:r>
-              <a:rPr lang="en-US"/>
+              <a:rPr lang="en-US" smtClean="0"/>
               <a:t>Second level</a:t>
             </a:r>
           </a:p>
           <a:p>
             <a:pPr lvl="2"/>
             <a:r>
-              <a:rPr lang="en-US"/>
+              <a:rPr lang="en-US" smtClean="0"/>
               <a:t>Third level</a:t>
             </a:r>
           </a:p>
           <a:p>
             <a:pPr lvl="3"/>
             <a:r>
-              <a:rPr lang="en-US"/>
+              <a:rPr lang="en-US" smtClean="0"/>
               <a:t>Fourth level</a:t>
             </a:r>
           </a:p>
           <a:p>
             <a:pPr lvl="4"/>
             <a:r>
-              <a:rPr lang="en-US"/>
+              <a:rPr lang="en-US" smtClean="0"/>
               <a:t>Fifth level</a:t>
             </a:r>
+            <a:endParaRPr lang="en-US"/>
           </a:p>
         </p:txBody>
       </p:sp>
@@ -1295,37 +1290,38 @@
           <a:p>
             <a:pPr lvl="0"/>
             <a:r>
-              <a:rPr lang="en-US"/>
+              <a:rPr lang="en-US" smtClean="0"/>
               <a:t>Click to edit Master text styles</a:t>
             </a:r>
           </a:p>
           <a:p>
             <a:pPr lvl="1"/>
             <a:r>
-              <a:rPr lang="en-US"/>
+              <a:rPr lang="en-US" smtClean="0"/>
               <a:t>Second level</a:t>
             </a:r>
           </a:p>
           <a:p>
             <a:pPr lvl="2"/>
             <a:r>
-              <a:rPr lang="en-US"/>
+              <a:rPr lang="en-US" smtClean="0"/>
               <a:t>Third level</a:t>
             </a:r>
           </a:p>
           <a:p>
             <a:pPr lvl="3"/>
             <a:r>
-              <a:rPr lang="en-US"/>
+              <a:rPr lang="en-US" smtClean="0"/>
               <a:t>Fourth level</a:t>
             </a:r>
           </a:p>
           <a:p>
             <a:pPr lvl="4"/>
             <a:r>
-              <a:rPr lang="en-US"/>
+              <a:rPr lang="en-US" smtClean="0"/>
               <a:t>Fifth level</a:t>
             </a:r>
+            <a:endParaRPr lang="en-US"/>
           </a:p>
         </p:txBody>
       </p:sp>
@@ -1346,7 +1342,7 @@
           <a:p>
             <a:fld id="{5BCAD085-E8A6-8845-BD4E-CB4CCA059FC4}" type="datetimeFigureOut">
               <a:rPr lang="en-US" smtClean="0"/>
-              <a:t>8/17/26</a:t>
+              <a:t>1/27/13</a:t>
             </a:fld>
             <a:endParaRPr lang="en-US"/>
           </a:p>
@@ -1444,9 +1440,10 @@
           </a:lstStyle>
           <a:p>
             <a:r>
-              <a:rPr lang="en-US"/>
+              <a:rPr lang="en-US" smtClean="0"/>
               <a:t>Click to edit Master title style</a:t>
             </a:r>
+            <a:endParaRPr lang="en-US"/>
           </a:p>
         </p:txBody>
       </p:sp>
@@ -1509,7 +1506,7 @@
           <a:p>
             <a:pPr lvl="0"/>
             <a:r>
-              <a:rPr lang="en-US"/>
+              <a:rPr lang="en-US" smtClean="0"/>
               <a:t>Click to edit Master text styles</a:t>
             </a:r>
           </a:p>
@@ -1565,37 +1562,38 @@
           <a:p>
             <a:pPr lvl="0"/>
             <a:r>
-              <a:rPr lang="en-US"/>
+              <a:rPr lang="en-US" smtClean="0"/>
               <a:t>Click to edit Master text styles</a:t>
             </a:r>
           </a:p>
           <a:p>
             <a:pPr lvl="1"/>
             <a:r>
-              <a:rPr lang="en-US"/>
+              <a:rPr lang="en-US" smtClean="0"/>
               <a:t>Second level</a:t>
             </a:r>
           </a:p>
           <a:p>
             <a:pPr lvl="2"/>
             <a:r>
-              <a:rPr lang="en-US"/>
+              <a:rPr lang="en-US" smtClean="0"/>
               <a:t>Third level</a:t>
             </a:r>
           </a:p>
           <a:p>
             <a:pPr lvl="3"/>
             <a:r>
-              <a:rPr lang="en-US"/>
+              <a:rPr lang="en-US" smtClean="0"/>
               <a:t>Fourth level</a:t>
             </a:r>
           </a:p>
           <a:p>
             <a:pPr lvl="4"/>
             <a:r>
-              <a:rPr lang="en-US"/>
+              <a:rPr lang="en-US" smtClean="0"/>
               <a:t>Fifth level</a:t>
             </a:r>
+            <a:endParaRPr lang="en-US"/>
           </a:p>
         </p:txBody>
       </p:sp>
@@ -1658,7 +1656,7 @@
           <a:p>
             <a:pPr lvl="0"/>
             <a:r>
-              <a:rPr lang="en-US"/>
+              <a:rPr lang="en-US" smtClean="0"/>
               <a:t>Click to edit Master text styles</a:t>
             </a:r>
           </a:p>
@@ -1714,37 +1712,38 @@
           <a:p>
             <a:pPr lvl="0"/>
             <a:r>
-              <a:rPr lang="en-US"/>
+              <a:rPr lang="en-US" smtClean="0"/>
               <a:t>Click to edit Master text styles</a:t>
             </a:r>
           </a:p>
           <a:p>
             <a:pPr lvl="1"/>
             <a:r>
-              <a:rPr lang="en-US"/>
+              <a:rPr lang="en-US" smtClean="0"/>
               <a:t>Second level</a:t>
             </a:r>
           </a:p>
           <a:p>
             <a:pPr lvl="2"/>
             <a:r>
-              <a:rPr lang="en-US"/>
+              <a:rPr lang="en-US" smtClean="0"/>
               <a:t>Third level</a:t>
             </a:r>
           </a:p>
           <a:p>
             <a:pPr lvl="3"/>
             <a:r>
-              <a:rPr lang="en-US"/>
+              <a:rPr lang="en-US" smtClean="0"/>
               <a:t>Fourth level</a:t>
             </a:r>
           </a:p>
           <a:p>
             <a:pPr lvl="4"/>
             <a:r>
-              <a:rPr lang="en-US"/>
+              <a:rPr lang="en-US" smtClean="0"/>
               <a:t>Fifth level</a:t>
             </a:r>
+            <a:endParaRPr lang="en-US"/>
           </a:p>
         </p:txBody>
       </p:sp>
@@ -1765,7 +1764,7 @@
           <a:p>
             <a:fld id="{5BCAD085-E8A6-8845-BD4E-CB4CCA059FC4}" type="datetimeFigureOut">
               <a:rPr lang="en-US" smtClean="0"/>
-              <a:t>8/17/26</a:t>
+              <a:t>1/27/13</a:t>
             </a:fld>
             <a:endParaRPr lang="en-US"/>
           </a:p>
@@ -1859,9 +1858,10 @@
           <a:lstStyle/>
           <a:p>
             <a:r>
-              <a:rPr lang="en-US"/>
+              <a:rPr lang="en-US" smtClean="0"/>
               <a:t>Click to edit Master title style</a:t>
             </a:r>
+            <a:endParaRPr lang="en-US"/>
           </a:p>
         </p:txBody>
       </p:sp>
@@ -1882,7 +1882,7 @@
           <a:p>
             <a:fld id="{5BCAD085-E8A6-8845-BD4E-CB4CCA059FC4}" type="datetimeFigureOut">
               <a:rPr lang="en-US" smtClean="0"/>
-              <a:t>8/17/26</a:t>
+              <a:t>1/27/13</a:t>
             </a:fld>
             <a:endParaRPr lang="en-US"/>
           </a:p>
@@ -1977,7 +1977,7 @@
           <a:p>
             <a:fld id="{5BCAD085-E8A6-8845-BD4E-CB4CCA059FC4}" type="datetimeFigureOut">
               <a:rPr lang="en-US" smtClean="0"/>
-              <a:t>8/17/26</a:t>
+              <a:t>1/27/13</a:t>
             </a:fld>
             <a:endParaRPr lang="en-US"/>
           </a:p>
@@ -2080,9 +2080,10 @@
           </a:lstStyle>
           <a:p>
             <a:r>
-              <a:rPr lang="en-US"/>
+              <a:rPr lang="en-US" smtClean="0"/>
               <a:t>Click to edit Master title style</a:t>
             </a:r>
+            <a:endParaRPr lang="en-US"/>
           </a:p>
         </p:txBody>
       </p:sp>
@@ -2136,37 +2137,38 @@
           <a:p>
             <a:pPr lvl="0"/>
             <a:r>
-              <a:rPr lang="en-US"/>
+              <a:rPr lang="en-US" smtClean="0"/>
               <a:t>Click to edit Master text styles</a:t>
             </a:r>
           </a:p>
           <a:p>
             <a:pPr lvl="1"/>
             <a:r>
-              <a:rPr lang="en-US"/>
+              <a:rPr lang="en-US" smtClean="0"/>
               <a:t>Second level</a:t>
             </a:r>
           </a:p>
           <a:p>
             <a:pPr lvl="2"/>
             <a:r>
-              <a:rPr lang="en-US"/>
+              <a:rPr lang="en-US" smtClean="0"/>
               <a:t>Third level</a:t>
             </a:r>
           </a:p>
           <a:p>
             <a:pPr lvl="3"/>
             <a:r>
-              <a:rPr lang="en-US"/>
+              <a:rPr lang="en-US" smtClean="0"/>
               <a:t>Fourth level</a:t>
             </a:r>
           </a:p>
           <a:p>
             <a:pPr lvl="4"/>
             <a:r>
-              <a:rPr lang="en-US"/>
+              <a:rPr lang="en-US" smtClean="0"/>
               <a:t>Fifth level</a:t>
             </a:r>
+            <a:endParaRPr lang="en-US"/>
           </a:p>
         </p:txBody>
       </p:sp>
@@ -2229,7 +2231,7 @@
           <a:p>
             <a:pPr lvl="0"/>
             <a:r>
-              <a:rPr lang="en-US"/>
+              <a:rPr lang="en-US" smtClean="0"/>
               <a:t>Click to edit Master text styles</a:t>
             </a:r>
           </a:p>
@@ -2252,7 +2254,7 @@
           <a:p>
             <a:fld id="{5BCAD085-E8A6-8845-BD4E-CB4CCA059FC4}" type="datetimeFigureOut">
               <a:rPr lang="en-US" smtClean="0"/>
-              <a:t>8/17/26</a:t>
+              <a:t>1/27/13</a:t>
             </a:fld>
             <a:endParaRPr lang="en-US"/>
           </a:p>
@@ -2355,9 +2357,10 @@
           </a:lstStyle>
           <a:p>
             <a:r>
-              <a:rPr lang="en-US"/>
+              <a:rPr lang="en-US" smtClean="0"/>
               <a:t>Click to edit Master title style</a:t>
             </a:r>
+            <a:endParaRPr lang="en-US"/>
           </a:p>
         </p:txBody>
       </p:sp>
@@ -2481,7 +2484,7 @@
           <a:p>
             <a:pPr lvl="0"/>
             <a:r>
-              <a:rPr lang="en-US"/>
+              <a:rPr lang="en-US" smtClean="0"/>
               <a:t>Click to edit Master text styles</a:t>
             </a:r>
           </a:p>
@@ -2504,7 +2507,7 @@
           <a:p>
             <a:fld id="{5BCAD085-E8A6-8845-BD4E-CB4CCA059FC4}" type="datetimeFigureOut">
               <a:rPr lang="en-US" smtClean="0"/>
-              <a:t>8/17/26</a:t>
+              <a:t>1/27/13</a:t>
             </a:fld>
             <a:endParaRPr lang="en-US"/>
           </a:p>
@@ -2613,9 +2616,10 @@
           <a:lstStyle/>
           <a:p>
             <a:r>
-              <a:rPr lang="en-US"/>
+              <a:rPr lang="en-US" smtClean="0"/>
               <a:t>Click to edit Master title style</a:t>
             </a:r>
+            <a:endParaRPr lang="en-US"/>
           </a:p>
         </p:txBody>
       </p:sp>
@@ -2646,37 +2650,38 @@
           <a:p>
             <a:pPr lvl="0"/>
             <a:r>
-              <a:rPr lang="en-US"/>
+              <a:rPr lang="en-US" smtClean="0"/>
               <a:t>Click to edit Master text styles</a:t>
             </a:r>
           </a:p>
           <a:p>
             <a:pPr lvl="1"/>
             <a:r>
-              <a:rPr lang="en-US"/>
+              <a:rPr lang="en-US" smtClean="0"/>
               <a:t>Second level</a:t>
             </a:r>
           </a:p>
           <a:p>
             <a:pPr lvl="2"/>
             <a:r>
-              <a:rPr lang="en-US"/>
+              <a:rPr lang="en-US" smtClean="0"/>
               <a:t>Third level</a:t>
             </a:r>
           </a:p>
           <a:p>
             <a:pPr lvl="3"/>
             <a:r>
-              <a:rPr lang="en-US"/>
+              <a:rPr lang="en-US" smtClean="0"/>
               <a:t>Fourth level</a:t>
             </a:r>
           </a:p>
           <a:p>
             <a:pPr lvl="4"/>
             <a:r>
-              <a:rPr lang="en-US"/>
+              <a:rPr lang="en-US" smtClean="0"/>
               <a:t>Fifth level</a:t>
             </a:r>
+            <a:endParaRPr lang="en-US"/>
           </a:p>
         </p:txBody>
       </p:sp>
@@ -2715,7 +2720,7 @@
           <a:p>
             <a:fld id="{5BCAD085-E8A6-8845-BD4E-CB4CCA059FC4}" type="datetimeFigureOut">
               <a:rPr lang="en-US" smtClean="0"/>
-              <a:t>8/17/26</a:t>
+              <a:t>1/27/13</a:t>
             </a:fld>
             <a:endParaRPr lang="en-US"/>
           </a:p>
@@ -3074,7 +3079,7 @@
 </file>
 
 <file path=ppt/slides/slide1.xml><?xml version="1.0" encoding="utf-8"?>
-<p:sld xmlns:a="http://schemas.openxmlformats.org/drawingml/2006/main" xmlns:r="http://schemas.openxmlformats.org/officeDocument/2006/relationships" xmlns:p="http://schemas.openxmlformats.org/presentationml/2006/main">
+<p:sld xmlns:a="http://schemas.openxmlformats.org/drawingml/2006/main" xmlns:p="http://schemas.openxmlformats.org/presentationml/2006/main" xmlns:r="http://schemas.openxmlformats.org/officeDocument/2006/relationships">
   <p:cSld>
     <p:spTree>
       <p:nvGrpSpPr>
@@ -3082,293 +3087,69 @@
         <p:cNvGrpSpPr/>
         <p:nvPr/>
       </p:nvGrpSpPr>
-      <p:grpSpPr>
-        <a:xfrm>
-          <a:off x="0" y="0"/>
-          <a:ext cx="0" cy="0"/>
-          <a:chOff x="0" y="0"/>
-          <a:chExt cx="0" cy="0"/>
-        </a:xfrm>
-      </p:grpSpPr>
-      <mc:AlternateContent xmlns:mc="http://schemas.openxmlformats.org/markup-compatibility/2006">
-        <mc:Choice xmlns:a14="http://schemas.microsoft.com/office/drawing/2010/main" Requires="a14">
-          <p:sp>
-            <p:nvSpPr>
-              <p:cNvPr id="2" name="TextBox 1"/>
-              <p:cNvSpPr txBox="1"/>
-              <p:nvPr/>
-            </p:nvSpPr>
-            <p:spPr>
-              <a:xfrm>
-                <a:off x="384048" y="219456"/>
-                <a:ext cx="10413492" cy="400110"/>
-              </a:xfrm>
-              <a:prstGeom prst="rect">
-                <a:avLst/>
-              </a:prstGeom>
-              <a:noFill/>
-            </p:spPr>
-            <p:txBody>
-              <a:bodyPr wrap="none">
-                <a:spAutoFit/>
-              </a:bodyPr>
-              <a:lstStyle/>
-              <a:p>
-                <a:r>
-                  <a:rPr sz="2000" b="1" i="0" baseline="0" dirty="0">
-                    <a:latin typeface="Calibri"/>
-                  </a:rPr>
-                  <a:t>PD21 — Calibrate homophily </a:t>
-                </a:r>
-                <a14:m>
-                  <m:oMath xmlns:m="http://schemas.openxmlformats.org/officeDocument/2006/math">
-                    <m:r>
-                      <a:rPr lang="en-US" sz="2000" b="1" i="0" baseline="0" dirty="0" smtClean="0">
-                        <a:latin typeface="Cambria Math" panose="02040503050406030204" pitchFamily="18" charset="0"/>
-                      </a:rPr>
-                      <m:t>𝜌</m:t>
-                    </m:r>
-                  </m:oMath>
-                </a14:m>
-                <a:r>
-                  <a:rPr sz="2000" b="1" i="0" baseline="0" dirty="0">
-                    <a:latin typeface="Calibri"/>
-                  </a:rPr>
-                  <a:t> to empirical sorting index </a:t>
-                </a:r>
-                <a14:m>
-                  <m:oMath xmlns:m="http://schemas.openxmlformats.org/officeDocument/2006/math">
-                    <m:sSub>
-                      <m:sSubPr>
-                        <m:ctrlPr>
-                          <a:rPr lang="en-US" sz="2000" b="1" i="0" baseline="0" dirty="0">
-                            <a:latin typeface="Cambria Math" panose="02040503050406030204" pitchFamily="18" charset="0"/>
-                          </a:rPr>
-                        </m:ctrlPr>
-                      </m:sSubPr>
-                      <m:e>
-                        <m:r>
-                          <a:rPr lang="en-US" sz="2000" b="1" i="0" baseline="0" dirty="0">
-                            <a:latin typeface="Cambria Math" panose="02040503050406030204" pitchFamily="18" charset="0"/>
-                          </a:rPr>
-                          <m:t>𝐻</m:t>
-                        </m:r>
-                      </m:e>
-                      <m:sub>
-                        <m:r>
-                          <m:rPr>
-                            <m:sty m:val="p"/>
-                          </m:rPr>
-                          <a:rPr lang="en-US" sz="2000" b="1" i="0" baseline="0" dirty="0">
-                            <a:latin typeface="Cambria Math" panose="02040503050406030204" pitchFamily="18" charset="0"/>
-                          </a:rPr>
-                          <m:t>sort</m:t>
-                        </m:r>
-                      </m:sub>
-                    </m:sSub>
-                  </m:oMath>
-                </a14:m>
-                <a:r>
-                  <a:rPr sz="2000" b="1" i="0" baseline="0" dirty="0">
-                    <a:latin typeface="Calibri"/>
-                  </a:rPr>
-                  <a:t> (hero panel — locked calibration)</a:t>
-                </a:r>
-              </a:p>
-            </p:txBody>
-          </p:sp>
-        </mc:Choice>
-        <mc:Fallback>
-          <p:sp>
-            <p:nvSpPr>
-              <p:cNvPr id="2" name="TextBox 1"/>
-              <p:cNvSpPr txBox="1">
-                <a:spLocks noRot="1" noChangeAspect="1" noMove="1" noResize="1" noEditPoints="1" noAdjustHandles="1" noChangeArrowheads="1" noChangeShapeType="1" noTextEdit="1"/>
-              </p:cNvSpPr>
-              <p:nvPr/>
-            </p:nvSpPr>
-            <p:spPr>
-              <a:xfrm>
-                <a:off x="384048" y="219456"/>
-                <a:ext cx="10413492" cy="400110"/>
-              </a:xfrm>
-              <a:prstGeom prst="rect">
-                <a:avLst/>
-              </a:prstGeom>
-              <a:blipFill>
-                <a:blip r:embed="rId2"/>
-                <a:stretch>
-                  <a:fillRect l="-609" t="-9375" b="-28125"/>
-                </a:stretch>
-              </a:blipFill>
-            </p:spPr>
-            <p:txBody>
-              <a:bodyPr/>
-              <a:lstStyle/>
-              <a:p>
-                <a:r>
-                  <a:rPr lang="en-US">
-                    <a:noFill/>
-                  </a:rPr>
-                  <a:t> </a:t>
-                </a:r>
-              </a:p>
-            </p:txBody>
-          </p:sp>
-        </mc:Fallback>
-      </mc:AlternateContent>
-      <mc:AlternateContent xmlns:mc="http://schemas.openxmlformats.org/markup-compatibility/2006">
-        <mc:Choice xmlns:a14="http://schemas.microsoft.com/office/drawing/2010/main" Requires="a14">
-          <p:sp>
-            <p:nvSpPr>
-              <p:cNvPr id="3" name="TextBox 2"/>
-              <p:cNvSpPr txBox="1"/>
-              <p:nvPr/>
-            </p:nvSpPr>
-            <p:spPr>
-              <a:xfrm>
-                <a:off x="384048" y="713232"/>
-                <a:ext cx="5721118" cy="246221"/>
-              </a:xfrm>
-              <a:prstGeom prst="rect">
-                <a:avLst/>
-              </a:prstGeom>
-              <a:noFill/>
-            </p:spPr>
-            <p:txBody>
-              <a:bodyPr wrap="none">
-                <a:spAutoFit/>
-              </a:bodyPr>
-              <a:lstStyle/>
-              <a:p>
-                <a:r>
-                  <a:rPr sz="1000" b="0" i="0" baseline="0" dirty="0">
-                    <a:latin typeface="Calibri"/>
-                  </a:rPr>
-                  <a:t>PD21 · LG ASSIGN calibration · 2011-2021 · </a:t>
-                </a:r>
-                <a14:m>
-                  <m:oMath xmlns:m="http://schemas.openxmlformats.org/officeDocument/2006/math">
-                    <m:r>
-                      <a:rPr lang="en-US" sz="1000" b="0" i="0" baseline="0" dirty="0" smtClean="0">
-                        <a:latin typeface="Cambria Math" panose="02040503050406030204" pitchFamily="18" charset="0"/>
-                      </a:rPr>
-                      <m:t>50</m:t>
-                    </m:r>
-                  </m:oMath>
-                </a14:m>
-                <a:r>
-                  <a:rPr sz="1000" b="0" i="0" baseline="0" dirty="0">
-                    <a:latin typeface="Calibri"/>
-                  </a:rPr>
-                  <a:t> seeds · bracket </a:t>
-                </a:r>
-                <a:r>
-                  <a:rPr sz="1000" b="0" i="0" baseline="0" dirty="0" err="1">
-                    <a:latin typeface="Calibri"/>
-                  </a:rPr>
-                  <a:t>tol</a:t>
-                </a:r>
-                <a14:m>
-                  <m:oMath xmlns:m="http://schemas.openxmlformats.org/officeDocument/2006/math">
-                    <m:r>
-                      <a:rPr lang="en-US" sz="1000" b="0" i="0" baseline="0" dirty="0" smtClean="0">
-                        <a:latin typeface="Cambria Math" panose="02040503050406030204" pitchFamily="18" charset="0"/>
-                      </a:rPr>
-                      <m:t>=0.001</m:t>
-                    </m:r>
-                  </m:oMath>
-                </a14:m>
-                <a:r>
-                  <a:rPr sz="1000" b="0" i="0" baseline="0" dirty="0">
-                    <a:latin typeface="Calibri"/>
-                  </a:rPr>
-                  <a:t> · longitudinal </a:t>
-                </a:r>
-                <a14:m>
-                  <m:oMath xmlns:m="http://schemas.openxmlformats.org/officeDocument/2006/math">
-                    <m:sSup>
-                      <m:sSupPr>
-                        <m:ctrlPr>
-                          <a:rPr lang="en-US" sz="1000" b="0" i="0" baseline="0" dirty="0">
-                            <a:latin typeface="Cambria Math" panose="02040503050406030204" pitchFamily="18" charset="0"/>
-                          </a:rPr>
-                        </m:ctrlPr>
-                      </m:sSupPr>
-                      <m:e>
-                        <m:r>
-                          <a:rPr lang="en-US" sz="1000" b="0" i="0" baseline="0" dirty="0">
-                            <a:latin typeface="Cambria Math" panose="02040503050406030204" pitchFamily="18" charset="0"/>
-                          </a:rPr>
-                          <m:t>𝜌</m:t>
-                        </m:r>
-                      </m:e>
-                      <m:sup>
-                        <m:r>
-                          <a:rPr lang="en-US" sz="1000" b="0" i="0" baseline="0" dirty="0">
-                            <a:latin typeface="Cambria Math" panose="02040503050406030204" pitchFamily="18" charset="0"/>
-                          </a:rPr>
-                          <m:t>∗</m:t>
-                        </m:r>
-                      </m:sup>
-                    </m:sSup>
-                    <m:r>
-                      <a:rPr lang="en-US" sz="1000" b="0" i="0" baseline="0" dirty="0">
-                        <a:latin typeface="Cambria Math" panose="02040503050406030204" pitchFamily="18" charset="0"/>
-                      </a:rPr>
-                      <m:t>≈0</m:t>
-                    </m:r>
-                  </m:oMath>
-                </a14:m>
-                <a:r>
-                  <a:rPr sz="1000" b="0" i="0" baseline="0" dirty="0">
-                    <a:latin typeface="Calibri"/>
-                  </a:rPr>
-                  <a:t> · hero panel</a:t>
-                </a:r>
-              </a:p>
-            </p:txBody>
-          </p:sp>
-        </mc:Choice>
-        <mc:Fallback>
-          <p:sp>
-            <p:nvSpPr>
-              <p:cNvPr id="3" name="TextBox 2"/>
-              <p:cNvSpPr txBox="1">
-                <a:spLocks noRot="1" noChangeAspect="1" noMove="1" noResize="1" noEditPoints="1" noAdjustHandles="1" noChangeArrowheads="1" noChangeShapeType="1" noTextEdit="1"/>
-              </p:cNvSpPr>
-              <p:nvPr/>
-            </p:nvSpPr>
-            <p:spPr>
-              <a:xfrm>
-                <a:off x="384048" y="713232"/>
-                <a:ext cx="5721118" cy="246221"/>
-              </a:xfrm>
-              <a:prstGeom prst="rect">
-                <a:avLst/>
-              </a:prstGeom>
-              <a:blipFill>
-                <a:blip r:embed="rId3"/>
-                <a:stretch>
-                  <a:fillRect b="-10000"/>
-                </a:stretch>
-              </a:blipFill>
-            </p:spPr>
-            <p:txBody>
-              <a:bodyPr/>
-              <a:lstStyle/>
-              <a:p>
-                <a:r>
-                  <a:rPr lang="en-US">
-                    <a:noFill/>
-                  </a:rPr>
-                  <a:t> </a:t>
-                </a:r>
-              </a:p>
-            </p:txBody>
-          </p:sp>
-        </mc:Fallback>
-      </mc:AlternateContent>
+      <p:grpSpPr/>
+      <p:sp>
+        <p:nvSpPr>
+          <p:cNvPr id="2" name="TextBox 1"/>
+          <p:cNvSpPr txBox="1"/>
+          <p:nvPr/>
+        </p:nvSpPr>
+        <p:spPr>
+          <a:xfrm>
+            <a:off x="384048" y="219456"/>
+            <a:ext cx="11423599" cy="457200"/>
+          </a:xfrm>
+          <a:prstGeom prst="rect">
+            <a:avLst/>
+          </a:prstGeom>
+          <a:noFill/>
+        </p:spPr>
+        <p:txBody>
+          <a:bodyPr wrap="none">
+            <a:spAutoFit/>
+          </a:bodyPr>
+          <a:lstStyle/>
+          <a:p>
+            <a:r>
+              <a:rPr sz="2000" b="1" i="0" baseline="0">
+                <a:latin typeface="Calibri"/>
+              </a:rPr>
+              <a:t>PD21 — Calibrate homophily $\rho$ to empirical sorting index $H_{\mathrm{sort}}$ (hero panel — locked calibration)</a:t>
+            </a:r>
+          </a:p>
+        </p:txBody>
+      </p:sp>
+      <p:sp>
+        <p:nvSpPr>
+          <p:cNvPr id="3" name="TextBox 2"/>
+          <p:cNvSpPr txBox="1"/>
+          <p:nvPr/>
+        </p:nvSpPr>
+        <p:spPr>
+          <a:xfrm>
+            <a:off x="384048" y="713232"/>
+            <a:ext cx="11423599" cy="246888"/>
+          </a:xfrm>
+          <a:prstGeom prst="rect">
+            <a:avLst/>
+          </a:prstGeom>
+          <a:noFill/>
+        </p:spPr>
+        <p:txBody>
+          <a:bodyPr wrap="none">
+            <a:spAutoFit/>
+          </a:bodyPr>
+          <a:lstStyle/>
+          <a:p>
+            <a:r>
+              <a:rPr sz="1000" b="0" i="0" baseline="0">
+                <a:latin typeface="Calibri"/>
+              </a:rPr>
+              <a:t>PD21 · LG ASSIGN calibration · 2011-2021 · 50 seeds · bracket tol=0.001 · longitudinal $\rho^* \approx 0$ · hero panel</a:t>
+            </a:r>
+          </a:p>
+        </p:txBody>
+      </p:sp>
       <p:pic>
         <p:nvPicPr>
           <p:cNvPr id="4" name="Picture 3" descr="PD21_rho_hsort_calibrate_2011_2021_bracket.png"/>
@@ -3378,1945 +3159,356 @@
           <p:nvPr/>
         </p:nvPicPr>
         <p:blipFill>
-          <a:blip r:embed="rId4"/>
+          <a:blip r:embed="rId2"/>
           <a:stretch>
             <a:fillRect/>
           </a:stretch>
         </p:blipFill>
         <p:spPr>
           <a:xfrm>
-            <a:off x="4379976" y="1160349"/>
-            <a:ext cx="7653840" cy="4982550"/>
+            <a:off x="4379976" y="1107353"/>
+            <a:ext cx="7427671" cy="4835317"/>
           </a:xfrm>
           <a:prstGeom prst="rect">
             <a:avLst/>
           </a:prstGeom>
         </p:spPr>
       </p:pic>
-      <mc:AlternateContent xmlns:mc="http://schemas.openxmlformats.org/markup-compatibility/2006">
-        <mc:Choice xmlns:a14="http://schemas.microsoft.com/office/drawing/2010/main" Requires="a14">
-          <p:sp>
-            <p:nvSpPr>
-              <p:cNvPr id="5" name="TextBox 4"/>
-              <p:cNvSpPr txBox="1"/>
-              <p:nvPr/>
-            </p:nvSpPr>
-            <p:spPr>
-              <a:xfrm>
-                <a:off x="283932" y="1199867"/>
-                <a:ext cx="4147904" cy="4481291"/>
-              </a:xfrm>
-              <a:prstGeom prst="rect">
-                <a:avLst/>
-              </a:prstGeom>
-              <a:noFill/>
-            </p:spPr>
-            <p:txBody>
-              <a:bodyPr wrap="square">
-                <a:spAutoFit/>
-              </a:bodyPr>
-              <a:lstStyle/>
-              <a:p>
-                <a:pPr>
-                  <a:buChar char="•"/>
-                </a:pPr>
-                <a:r>
-                  <a:rPr sz="1000" b="0" i="0" baseline="0" dirty="0">
-                    <a:latin typeface="Calibri"/>
-                  </a:rPr>
-                  <a:t>  PD21 locked calibration (Aug 2026): bracket search on hero panel for Alex ASSIGN $\rho$.</a:t>
-                </a:r>
-              </a:p>
-              <a:p>
-                <a:pPr>
-                  <a:buChar char="•"/>
-                </a:pPr>
-                <a:r>
-                  <a:rPr sz="1000" b="0" i="0" baseline="0" dirty="0">
-                    <a:latin typeface="Calibri"/>
-                  </a:rPr>
-                  <a:t>  Alex (Aug 2026): calibrate ASSIGN </a:t>
-                </a:r>
-                <a14:m>
-                  <m:oMath xmlns:m="http://schemas.openxmlformats.org/officeDocument/2006/math">
-                    <m:r>
-                      <a:rPr lang="en-US" sz="1000" b="0" i="0" baseline="0" dirty="0" smtClean="0">
-                        <a:latin typeface="Cambria Math" panose="02040503050406030204" pitchFamily="18" charset="0"/>
-                      </a:rPr>
-                      <m:t>𝜌</m:t>
-                    </m:r>
-                  </m:oMath>
-                </a14:m>
-                <a:r>
-                  <a:rPr sz="1000" b="0" i="0" baseline="0" dirty="0">
-                    <a:latin typeface="Calibri"/>
-                  </a:rPr>
-                  <a:t> so LG simulated </a:t>
-                </a:r>
-                <a14:m>
-                  <m:oMath xmlns:m="http://schemas.openxmlformats.org/officeDocument/2006/math">
-                    <m:sSub>
-                      <m:sSubPr>
-                        <m:ctrlPr>
-                          <a:rPr lang="en-US" sz="1000" b="0" i="0" baseline="0" dirty="0">
-                            <a:latin typeface="Cambria Math" panose="02040503050406030204" pitchFamily="18" charset="0"/>
-                          </a:rPr>
-                        </m:ctrlPr>
-                      </m:sSubPr>
-                      <m:e>
-                        <m:r>
-                          <a:rPr lang="en-US" sz="1000" b="0" i="0" baseline="0" dirty="0">
-                            <a:latin typeface="Cambria Math" panose="02040503050406030204" pitchFamily="18" charset="0"/>
-                          </a:rPr>
-                          <m:t>𝐻</m:t>
-                        </m:r>
-                      </m:e>
-                      <m:sub>
-                        <m:r>
-                          <m:rPr>
-                            <m:sty m:val="p"/>
-                          </m:rPr>
-                          <a:rPr lang="en-US" sz="1000" b="0" i="0" baseline="0" dirty="0">
-                            <a:latin typeface="Cambria Math" panose="02040503050406030204" pitchFamily="18" charset="0"/>
-                          </a:rPr>
-                          <m:t>sort</m:t>
-                        </m:r>
-                      </m:sub>
-                    </m:sSub>
-                  </m:oMath>
-                </a14:m>
-                <a:r>
-                  <a:rPr sz="1000" b="0" i="0" baseline="0" dirty="0">
-                    <a:latin typeface="Calibri"/>
-                  </a:rPr>
-                  <a:t> matches empirical NCAA; formal </a:t>
-                </a:r>
-                <a14:m>
-                  <m:oMath xmlns:m="http://schemas.openxmlformats.org/officeDocument/2006/math">
-                    <m:r>
-                      <a:rPr lang="en-US" sz="1000" b="0" i="0" baseline="0" dirty="0" smtClean="0">
-                        <a:latin typeface="Cambria Math" panose="02040503050406030204" pitchFamily="18" charset="0"/>
-                      </a:rPr>
-                      <m:t>𝜌</m:t>
-                    </m:r>
-                  </m:oMath>
-                </a14:m>
-                <a:r>
-                  <a:rPr sz="1000" b="0" i="0" baseline="0" dirty="0">
-                    <a:latin typeface="Calibri"/>
-                  </a:rPr>
-                  <a:t> MLE parked.</a:t>
-                </a:r>
-              </a:p>
-              <a:p>
-                <a:pPr>
-                  <a:buChar char="•"/>
-                </a:pPr>
-                <a:r>
-                  <a:rPr sz="1000" b="0" i="0" baseline="0" dirty="0">
-                    <a:latin typeface="Calibri"/>
-                  </a:rPr>
-                  <a:t>  Panel: 2011–2021 MBB · min</a:t>
-                </a:r>
-                <a14:m>
-                  <m:oMath xmlns:m="http://schemas.openxmlformats.org/officeDocument/2006/math">
-                    <m:r>
-                      <a:rPr lang="en-US" sz="1000" b="0" i="0" baseline="0" dirty="0" smtClean="0">
-                        <a:latin typeface="Cambria Math" panose="02040503050406030204" pitchFamily="18" charset="0"/>
-                      </a:rPr>
-                      <m:t>≥20</m:t>
-                    </m:r>
-                  </m:oMath>
-                </a14:m>
-                <a:r>
-                  <a:rPr sz="1000" b="0" i="0" baseline="0" dirty="0">
-                    <a:latin typeface="Calibri"/>
-                  </a:rPr>
-                  <a:t> min player-season drop · box QC at panel build · empirical roster caps · PPM z-scored within season.</a:t>
-                </a:r>
-              </a:p>
-              <a:p>
-                <a:pPr>
-                  <a:buChar char="•"/>
-                </a:pPr>
-                <a:r>
-                  <a:rPr sz="1000" b="0" i="0" baseline="0" dirty="0">
-                    <a:latin typeface="Calibri"/>
-                  </a:rPr>
-                  <a:t>  Search: bracket + bisect (</a:t>
-                </a:r>
-                <a:r>
-                  <a:rPr sz="1000" b="0" i="0" baseline="0" dirty="0" err="1">
-                    <a:latin typeface="Calibri"/>
-                  </a:rPr>
-                  <a:t>tol</a:t>
-                </a:r>
-                <a14:m>
-                  <m:oMath xmlns:m="http://schemas.openxmlformats.org/officeDocument/2006/math">
-                    <m:r>
-                      <a:rPr lang="en-US" sz="1000" b="0" i="0" baseline="0" dirty="0" smtClean="0">
-                        <a:latin typeface="Cambria Math" panose="02040503050406030204" pitchFamily="18" charset="0"/>
-                      </a:rPr>
-                      <m:t>=0.001</m:t>
-                    </m:r>
-                  </m:oMath>
-                </a14:m>
-                <a:r>
-                  <a:rPr sz="1000" b="0" i="0" baseline="0" dirty="0">
-                    <a:latin typeface="Calibri"/>
-                  </a:rPr>
-                  <a:t>), </a:t>
-                </a:r>
-                <a14:m>
-                  <m:oMath xmlns:m="http://schemas.openxmlformats.org/officeDocument/2006/math">
-                    <m:r>
-                      <a:rPr lang="en-US" sz="1000" b="0" i="0" baseline="0" dirty="0" smtClean="0">
-                        <a:latin typeface="Cambria Math" panose="02040503050406030204" pitchFamily="18" charset="0"/>
-                      </a:rPr>
-                      <m:t>50</m:t>
-                    </m:r>
-                  </m:oMath>
-                </a14:m>
-                <a:r>
-                  <a:rPr sz="1000" b="0" i="0" baseline="0" dirty="0">
-                    <a:latin typeface="Calibri"/>
-                  </a:rPr>
-                  <a:t> seeds/arm; </a:t>
-                </a:r>
-                <a14:m>
-                  <m:oMath xmlns:m="http://schemas.openxmlformats.org/officeDocument/2006/math">
-                    <m:sSubSup>
-                      <m:sSubSupPr>
-                        <m:ctrlPr>
-                          <a:rPr lang="en-US" sz="1000" b="0" i="0" baseline="0" dirty="0">
-                            <a:latin typeface="Cambria Math" panose="02040503050406030204" pitchFamily="18" charset="0"/>
-                          </a:rPr>
-                        </m:ctrlPr>
-                      </m:sSubSupPr>
-                      <m:e>
-                        <m:r>
-                          <a:rPr lang="en-US" sz="1000" b="0" i="0" baseline="0" dirty="0">
-                            <a:latin typeface="Cambria Math" panose="02040503050406030204" pitchFamily="18" charset="0"/>
-                          </a:rPr>
-                          <m:t>𝐻</m:t>
-                        </m:r>
-                      </m:e>
-                      <m:sub>
-                        <m:r>
-                          <m:rPr>
-                            <m:sty m:val="p"/>
-                          </m:rPr>
-                          <a:rPr lang="en-US" sz="1000" b="0" i="0" baseline="0" dirty="0">
-                            <a:latin typeface="Cambria Math" panose="02040503050406030204" pitchFamily="18" charset="0"/>
-                          </a:rPr>
-                          <m:t>sort</m:t>
-                        </m:r>
-                      </m:sub>
-                      <m:sup>
-                        <m:r>
-                          <m:rPr>
-                            <m:sty m:val="p"/>
-                          </m:rPr>
-                          <a:rPr lang="en-US" sz="1000" b="0" i="0" baseline="0" dirty="0">
-                            <a:latin typeface="Cambria Math" panose="02040503050406030204" pitchFamily="18" charset="0"/>
-                          </a:rPr>
-                          <m:t>sim</m:t>
-                        </m:r>
-                      </m:sup>
-                    </m:sSubSup>
-                  </m:oMath>
-                </a14:m>
-                <a:r>
-                  <a:rPr sz="1000" b="0" i="0" baseline="0" dirty="0">
-                    <a:latin typeface="Calibri"/>
-                  </a:rPr>
-                  <a:t> monotone in </a:t>
-                </a:r>
-                <a14:m>
-                  <m:oMath xmlns:m="http://schemas.openxmlformats.org/officeDocument/2006/math">
-                    <m:r>
-                      <a:rPr lang="en-US" sz="1000" b="0" i="0" baseline="0" dirty="0" smtClean="0">
-                        <a:latin typeface="Cambria Math" panose="02040503050406030204" pitchFamily="18" charset="0"/>
-                      </a:rPr>
-                      <m:t>𝜌</m:t>
-                    </m:r>
-                  </m:oMath>
-                </a14:m>
-                <a:r>
-                  <a:rPr sz="1000" b="0" i="0" baseline="0" dirty="0">
-                    <a:latin typeface="Calibri"/>
-                  </a:rPr>
-                  <a:t>.</a:t>
-                </a:r>
-              </a:p>
-              <a:p>
-                <a:pPr>
-                  <a:buChar char="•"/>
-                </a:pPr>
-                <a:r>
-                  <a:rPr sz="1000" b="0" i="0" baseline="0" dirty="0">
-                    <a:latin typeface="Calibri"/>
-                  </a:rPr>
-                  <a:t>  </a:t>
-                </a:r>
-                <a14:m>
-                  <m:oMath xmlns:m="http://schemas.openxmlformats.org/officeDocument/2006/math">
-                    <m:sSub>
-                      <m:sSubPr>
-                        <m:ctrlPr>
-                          <a:rPr lang="en-US" sz="1000" b="0" i="0" baseline="0" dirty="0">
-                            <a:latin typeface="Cambria Math" panose="02040503050406030204" pitchFamily="18" charset="0"/>
-                          </a:rPr>
-                        </m:ctrlPr>
-                      </m:sSubPr>
-                      <m:e>
-                        <m:r>
-                          <a:rPr lang="en-US" sz="1000" b="0" i="0" baseline="0" dirty="0">
-                            <a:latin typeface="Cambria Math" panose="02040503050406030204" pitchFamily="18" charset="0"/>
-                          </a:rPr>
-                          <m:t>𝐻</m:t>
-                        </m:r>
-                      </m:e>
-                      <m:sub>
-                        <m:r>
-                          <a:rPr lang="en-US" sz="1000" b="0" i="0" baseline="0" dirty="0">
-                            <a:latin typeface="Cambria Math" panose="02040503050406030204" pitchFamily="18" charset="0"/>
-                          </a:rPr>
-                          <m:t>𝑠𝑜𝑟𝑡</m:t>
-                        </m:r>
-                      </m:sub>
-                    </m:sSub>
-                    <m:r>
-                      <a:rPr lang="en-US" sz="1000" b="0" i="0" baseline="0" dirty="0">
-                        <a:latin typeface="Cambria Math" panose="02040503050406030204" pitchFamily="18" charset="0"/>
-                      </a:rPr>
-                      <m:t>=1−</m:t>
-                    </m:r>
-                    <m:nary>
-                      <m:naryPr>
-                        <m:chr m:val="∑"/>
-                        <m:limLoc m:val="undOvr"/>
-                        <m:supHide m:val="on"/>
-                        <m:ctrlPr>
-                          <a:rPr lang="en-US" sz="1000" b="0" i="0" baseline="0" dirty="0">
-                            <a:latin typeface="Cambria Math" panose="02040503050406030204" pitchFamily="18" charset="0"/>
-                          </a:rPr>
-                        </m:ctrlPr>
-                      </m:naryPr>
-                      <m:sub>
-                        <m:r>
-                          <a:rPr lang="en-US" sz="1000" b="0" i="0" baseline="0" dirty="0">
-                            <a:latin typeface="Cambria Math" panose="02040503050406030204" pitchFamily="18" charset="0"/>
-                          </a:rPr>
-                          <m:t>𝑖</m:t>
-                        </m:r>
-                      </m:sub>
-                      <m:sup/>
-                      <m:e>
-                        <m:sSup>
-                          <m:sSupPr>
-                            <m:ctrlPr>
-                              <a:rPr lang="en-US" sz="1000" b="0" i="0" baseline="0" dirty="0">
-                                <a:latin typeface="Cambria Math" panose="02040503050406030204" pitchFamily="18" charset="0"/>
-                              </a:rPr>
-                            </m:ctrlPr>
-                          </m:sSupPr>
-                          <m:e>
-                            <m:d>
-                              <m:dPr>
-                                <m:ctrlPr>
-                                  <a:rPr lang="en-US" sz="1000" b="0" i="0" baseline="0" dirty="0">
-                                    <a:latin typeface="Cambria Math" panose="02040503050406030204" pitchFamily="18" charset="0"/>
-                                  </a:rPr>
-                                </m:ctrlPr>
-                              </m:dPr>
-                              <m:e>
-                                <m:sSub>
-                                  <m:sSubPr>
-                                    <m:ctrlPr>
-                                      <a:rPr lang="en-US" sz="1000" b="0" i="0" baseline="0" dirty="0">
-                                        <a:latin typeface="Cambria Math" panose="02040503050406030204" pitchFamily="18" charset="0"/>
-                                      </a:rPr>
-                                    </m:ctrlPr>
-                                  </m:sSubPr>
-                                  <m:e>
-                                    <m:acc>
-                                      <m:accPr>
-                                        <m:chr m:val="ˆ"/>
-                                        <m:ctrlPr>
-                                          <a:rPr lang="en-US" sz="1000" b="0" i="0" baseline="0" dirty="0">
-                                            <a:latin typeface="Cambria Math" panose="02040503050406030204" pitchFamily="18" charset="0"/>
-                                          </a:rPr>
-                                        </m:ctrlPr>
-                                      </m:accPr>
-                                      <m:e>
-                                        <m:r>
-                                          <a:rPr lang="en-US" sz="1000" b="0" i="0" baseline="0" dirty="0">
-                                            <a:latin typeface="Cambria Math" panose="02040503050406030204" pitchFamily="18" charset="0"/>
-                                          </a:rPr>
-                                          <m:t>𝐴</m:t>
-                                        </m:r>
-                                      </m:e>
-                                    </m:acc>
-                                  </m:e>
-                                  <m:sub>
-                                    <m:r>
-                                      <a:rPr lang="en-US" sz="1000" b="0" i="0" baseline="0" dirty="0">
-                                        <a:latin typeface="Cambria Math" panose="02040503050406030204" pitchFamily="18" charset="0"/>
-                                      </a:rPr>
-                                      <m:t>𝑖</m:t>
-                                    </m:r>
-                                  </m:sub>
-                                </m:sSub>
-                                <m:r>
-                                  <a:rPr lang="en-US" sz="1000" b="0" i="0" baseline="0" dirty="0">
-                                    <a:latin typeface="Cambria Math" panose="02040503050406030204" pitchFamily="18" charset="0"/>
-                                  </a:rPr>
-                                  <m:t>−</m:t>
-                                </m:r>
-                                <m:sSub>
-                                  <m:sSubPr>
-                                    <m:ctrlPr>
-                                      <a:rPr lang="en-US" sz="1000" b="0" i="0" baseline="0" dirty="0">
-                                        <a:latin typeface="Cambria Math" panose="02040503050406030204" pitchFamily="18" charset="0"/>
-                                      </a:rPr>
-                                    </m:ctrlPr>
-                                  </m:sSubPr>
-                                  <m:e>
-                                    <m:acc>
-                                      <m:accPr>
-                                        <m:chr m:val="ˆ"/>
-                                        <m:ctrlPr>
-                                          <a:rPr lang="en-US" sz="1000" b="0" i="0" baseline="0" dirty="0">
-                                            <a:latin typeface="Cambria Math" panose="02040503050406030204" pitchFamily="18" charset="0"/>
-                                          </a:rPr>
-                                        </m:ctrlPr>
-                                      </m:accPr>
-                                      <m:e>
-                                        <m:r>
-                                          <a:rPr lang="en-US" sz="1000" b="0" i="0" baseline="0" dirty="0">
-                                            <a:latin typeface="Cambria Math" panose="02040503050406030204" pitchFamily="18" charset="0"/>
-                                          </a:rPr>
-                                          <m:t>𝜇</m:t>
-                                        </m:r>
-                                      </m:e>
-                                    </m:acc>
-                                  </m:e>
-                                  <m:sub>
-                                    <m:r>
-                                      <a:rPr lang="en-US" sz="1000" b="0" i="0" baseline="0" dirty="0">
-                                        <a:latin typeface="Cambria Math" panose="02040503050406030204" pitchFamily="18" charset="0"/>
-                                      </a:rPr>
-                                      <m:t>𝑔</m:t>
-                                    </m:r>
-                                    <m:d>
-                                      <m:dPr>
-                                        <m:ctrlPr>
-                                          <a:rPr lang="en-US" sz="1000" b="0" i="0" baseline="0" dirty="0">
-                                            <a:latin typeface="Cambria Math" panose="02040503050406030204" pitchFamily="18" charset="0"/>
-                                          </a:rPr>
-                                        </m:ctrlPr>
-                                      </m:dPr>
-                                      <m:e>
-                                        <m:r>
-                                          <a:rPr lang="en-US" sz="1000" b="0" i="0" baseline="0" dirty="0">
-                                            <a:latin typeface="Cambria Math" panose="02040503050406030204" pitchFamily="18" charset="0"/>
-                                          </a:rPr>
-                                          <m:t>𝑖</m:t>
-                                        </m:r>
-                                      </m:e>
-                                    </m:d>
-                                  </m:sub>
-                                </m:sSub>
-                              </m:e>
-                            </m:d>
-                          </m:e>
-                          <m:sup>
-                            <m:r>
-                              <a:rPr lang="en-US" sz="1000" b="0" i="0" baseline="0" dirty="0">
-                                <a:latin typeface="Cambria Math" panose="02040503050406030204" pitchFamily="18" charset="0"/>
-                              </a:rPr>
-                              <m:t>2</m:t>
-                            </m:r>
-                          </m:sup>
-                        </m:sSup>
-                      </m:e>
-                    </m:nary>
-                    <m:r>
-                      <a:rPr lang="en-US" sz="1000" b="0" i="0" baseline="0" dirty="0">
-                        <a:latin typeface="Cambria Math" panose="02040503050406030204" pitchFamily="18" charset="0"/>
-                      </a:rPr>
-                      <m:t>/</m:t>
-                    </m:r>
-                    <m:nary>
-                      <m:naryPr>
-                        <m:chr m:val="∑"/>
-                        <m:limLoc m:val="undOvr"/>
-                        <m:supHide m:val="on"/>
-                        <m:ctrlPr>
-                          <a:rPr lang="en-US" sz="1000" b="0" i="0" baseline="0" dirty="0">
-                            <a:latin typeface="Cambria Math" panose="02040503050406030204" pitchFamily="18" charset="0"/>
-                          </a:rPr>
-                        </m:ctrlPr>
-                      </m:naryPr>
-                      <m:sub>
-                        <m:r>
-                          <a:rPr lang="en-US" sz="1000" b="0" i="0" baseline="0" dirty="0">
-                            <a:latin typeface="Cambria Math" panose="02040503050406030204" pitchFamily="18" charset="0"/>
-                          </a:rPr>
-                          <m:t>𝑖</m:t>
-                        </m:r>
-                      </m:sub>
-                      <m:sup/>
-                      <m:e>
-                        <m:sSup>
-                          <m:sSupPr>
-                            <m:ctrlPr>
-                              <a:rPr lang="en-US" sz="1000" b="0" i="0" baseline="0" dirty="0">
-                                <a:latin typeface="Cambria Math" panose="02040503050406030204" pitchFamily="18" charset="0"/>
-                              </a:rPr>
-                            </m:ctrlPr>
-                          </m:sSupPr>
-                          <m:e>
-                            <m:d>
-                              <m:dPr>
-                                <m:ctrlPr>
-                                  <a:rPr lang="en-US" sz="1000" b="0" i="0" baseline="0" dirty="0">
-                                    <a:latin typeface="Cambria Math" panose="02040503050406030204" pitchFamily="18" charset="0"/>
-                                  </a:rPr>
-                                </m:ctrlPr>
-                              </m:dPr>
-                              <m:e>
-                                <m:sSub>
-                                  <m:sSubPr>
-                                    <m:ctrlPr>
-                                      <a:rPr lang="en-US" sz="1000" b="0" i="0" baseline="0" dirty="0">
-                                        <a:latin typeface="Cambria Math" panose="02040503050406030204" pitchFamily="18" charset="0"/>
-                                      </a:rPr>
-                                    </m:ctrlPr>
-                                  </m:sSubPr>
-                                  <m:e>
-                                    <m:acc>
-                                      <m:accPr>
-                                        <m:chr m:val="ˆ"/>
-                                        <m:ctrlPr>
-                                          <a:rPr lang="en-US" sz="1000" b="0" i="0" baseline="0" dirty="0">
-                                            <a:latin typeface="Cambria Math" panose="02040503050406030204" pitchFamily="18" charset="0"/>
-                                          </a:rPr>
-                                        </m:ctrlPr>
-                                      </m:accPr>
-                                      <m:e>
-                                        <m:r>
-                                          <a:rPr lang="en-US" sz="1000" b="0" i="0" baseline="0" dirty="0">
-                                            <a:latin typeface="Cambria Math" panose="02040503050406030204" pitchFamily="18" charset="0"/>
-                                          </a:rPr>
-                                          <m:t>𝐴</m:t>
-                                        </m:r>
-                                      </m:e>
-                                    </m:acc>
-                                  </m:e>
-                                  <m:sub>
-                                    <m:r>
-                                      <a:rPr lang="en-US" sz="1000" b="0" i="0" baseline="0" dirty="0">
-                                        <a:latin typeface="Cambria Math" panose="02040503050406030204" pitchFamily="18" charset="0"/>
-                                      </a:rPr>
-                                      <m:t>𝑖</m:t>
-                                    </m:r>
-                                  </m:sub>
-                                </m:sSub>
-                                <m:r>
-                                  <a:rPr lang="en-US" sz="1000" b="0" i="0" baseline="0" dirty="0">
-                                    <a:latin typeface="Cambria Math" panose="02040503050406030204" pitchFamily="18" charset="0"/>
-                                  </a:rPr>
-                                  <m:t>−</m:t>
-                                </m:r>
-                                <m:acc>
-                                  <m:accPr>
-                                    <m:chr m:val="̅"/>
-                                    <m:ctrlPr>
-                                      <a:rPr lang="en-US" sz="1000" b="0" i="0" baseline="0" dirty="0">
-                                        <a:latin typeface="Cambria Math" panose="02040503050406030204" pitchFamily="18" charset="0"/>
-                                      </a:rPr>
-                                    </m:ctrlPr>
-                                  </m:accPr>
-                                  <m:e>
-                                    <m:r>
-                                      <a:rPr lang="en-US" sz="1000" b="0" i="0" baseline="0" dirty="0">
-                                        <a:latin typeface="Cambria Math" panose="02040503050406030204" pitchFamily="18" charset="0"/>
-                                      </a:rPr>
-                                      <m:t>𝐴</m:t>
-                                    </m:r>
-                                  </m:e>
-                                </m:acc>
-                              </m:e>
-                            </m:d>
-                          </m:e>
-                          <m:sup>
-                            <m:r>
-                              <a:rPr lang="en-US" sz="1000" b="0" i="0" baseline="0" dirty="0">
-                                <a:latin typeface="Cambria Math" panose="02040503050406030204" pitchFamily="18" charset="0"/>
-                              </a:rPr>
-                              <m:t>2</m:t>
-                            </m:r>
-                          </m:sup>
-                        </m:sSup>
-                      </m:e>
-                    </m:nary>
-                  </m:oMath>
-                </a14:m>
-                <a:r>
-                  <a:rPr sz="1000" b="0" i="0" baseline="0" dirty="0">
-                    <a:latin typeface="Calibri"/>
-                  </a:rPr>
-                  <a:t> — realized sorting on a fixed partition.</a:t>
-                </a:r>
-              </a:p>
-              <a:p>
-                <a:pPr>
-                  <a:buChar char="•"/>
-                </a:pPr>
-                <a:r>
-                  <a:rPr sz="1000" b="0" i="0" baseline="0" dirty="0">
-                    <a:latin typeface="Calibri"/>
-                  </a:rPr>
-                  <a:t>  Longitudinal </a:t>
-                </a:r>
-                <a14:m>
-                  <m:oMath xmlns:m="http://schemas.openxmlformats.org/officeDocument/2006/math">
-                    <m:sSup>
-                      <m:sSupPr>
-                        <m:ctrlPr>
-                          <a:rPr lang="en-US" sz="1000" b="0" i="0" baseline="0" dirty="0">
-                            <a:latin typeface="Cambria Math" panose="02040503050406030204" pitchFamily="18" charset="0"/>
-                          </a:rPr>
-                        </m:ctrlPr>
-                      </m:sSupPr>
-                      <m:e>
-                        <m:r>
-                          <a:rPr lang="en-US" sz="1000" b="0" i="0" baseline="0" dirty="0">
-                            <a:latin typeface="Cambria Math" panose="02040503050406030204" pitchFamily="18" charset="0"/>
-                          </a:rPr>
-                          <m:t>𝜌</m:t>
-                        </m:r>
-                      </m:e>
-                      <m:sup>
-                        <m:r>
-                          <a:rPr lang="en-US" sz="1000" b="0" i="0" baseline="0" dirty="0">
-                            <a:latin typeface="Cambria Math" panose="02040503050406030204" pitchFamily="18" charset="0"/>
-                          </a:rPr>
-                          <m:t>∗</m:t>
-                        </m:r>
-                      </m:sup>
-                    </m:sSup>
-                    <m:r>
-                      <a:rPr lang="en-US" sz="1000" b="0" i="0" baseline="0" dirty="0">
-                        <a:latin typeface="Cambria Math" panose="02040503050406030204" pitchFamily="18" charset="0"/>
-                      </a:rPr>
-                      <m:t>≈0</m:t>
-                    </m:r>
-                  </m:oMath>
-                </a14:m>
-                <a:r>
-                  <a:rPr sz="1000" b="0" i="0" baseline="0" dirty="0">
-                    <a:latin typeface="Calibri"/>
-                  </a:rPr>
-                  <a:t>; mean </a:t>
-                </a:r>
-                <a14:m>
-                  <m:oMath xmlns:m="http://schemas.openxmlformats.org/officeDocument/2006/math">
-                    <m:sSubSup>
-                      <m:sSubSupPr>
-                        <m:ctrlPr>
-                          <a:rPr lang="en-US" sz="1000" b="0" i="0" baseline="0" dirty="0">
-                            <a:latin typeface="Cambria Math" panose="02040503050406030204" pitchFamily="18" charset="0"/>
-                          </a:rPr>
-                        </m:ctrlPr>
-                      </m:sSubSupPr>
-                      <m:e>
-                        <m:r>
-                          <a:rPr lang="en-US" sz="1000" b="0" i="0" baseline="0" dirty="0">
-                            <a:latin typeface="Cambria Math" panose="02040503050406030204" pitchFamily="18" charset="0"/>
-                          </a:rPr>
-                          <m:t>𝐻</m:t>
-                        </m:r>
-                      </m:e>
-                      <m:sub>
-                        <m:r>
-                          <m:rPr>
-                            <m:sty m:val="p"/>
-                          </m:rPr>
-                          <a:rPr lang="en-US" sz="1000" b="0" i="0" baseline="0" dirty="0">
-                            <a:latin typeface="Cambria Math" panose="02040503050406030204" pitchFamily="18" charset="0"/>
-                          </a:rPr>
-                          <m:t>sort</m:t>
-                        </m:r>
-                      </m:sub>
-                      <m:sup>
-                        <m:r>
-                          <m:rPr>
-                            <m:sty m:val="p"/>
-                          </m:rPr>
-                          <a:rPr lang="en-US" sz="1000" b="0" i="0" baseline="0" dirty="0">
-                            <a:latin typeface="Cambria Math" panose="02040503050406030204" pitchFamily="18" charset="0"/>
-                          </a:rPr>
-                          <m:t>sim</m:t>
-                        </m:r>
-                      </m:sup>
-                    </m:sSubSup>
-                  </m:oMath>
-                </a14:m>
-                <a:r>
-                  <a:rPr sz="1000" b="0" i="0" baseline="0" dirty="0">
-                    <a:latin typeface="Calibri"/>
-                  </a:rPr>
-                  <a:t> at </a:t>
-                </a:r>
-                <a14:m>
-                  <m:oMath xmlns:m="http://schemas.openxmlformats.org/officeDocument/2006/math">
-                    <m:sSup>
-                      <m:sSupPr>
-                        <m:ctrlPr>
-                          <a:rPr lang="en-US" sz="1000" b="0" i="0" baseline="0" dirty="0">
-                            <a:latin typeface="Cambria Math" panose="02040503050406030204" pitchFamily="18" charset="0"/>
-                          </a:rPr>
-                        </m:ctrlPr>
-                      </m:sSupPr>
-                      <m:e>
-                        <m:r>
-                          <a:rPr lang="en-US" sz="1000" b="0" i="0" baseline="0" dirty="0">
-                            <a:latin typeface="Cambria Math" panose="02040503050406030204" pitchFamily="18" charset="0"/>
-                          </a:rPr>
-                          <m:t>𝜌</m:t>
-                        </m:r>
-                      </m:e>
-                      <m:sup>
-                        <m:r>
-                          <a:rPr lang="en-US" sz="1000" b="0" i="0" baseline="0" dirty="0">
-                            <a:latin typeface="Cambria Math" panose="02040503050406030204" pitchFamily="18" charset="0"/>
-                          </a:rPr>
-                          <m:t>∗</m:t>
-                        </m:r>
-                      </m:sup>
-                    </m:sSup>
-                  </m:oMath>
-                </a14:m>
-                <a:r>
-                  <a:rPr sz="1000" b="0" i="0" baseline="0" dirty="0">
-                    <a:latin typeface="Calibri"/>
-                  </a:rPr>
-                  <a:t> </a:t>
-                </a:r>
-                <a14:m>
-                  <m:oMath xmlns:m="http://schemas.openxmlformats.org/officeDocument/2006/math">
-                    <m:r>
-                      <a:rPr lang="en-US" sz="1000" b="0" i="0" baseline="0" dirty="0" smtClean="0">
-                        <a:latin typeface="Cambria Math" panose="02040503050406030204" pitchFamily="18" charset="0"/>
-                      </a:rPr>
-                      <m:t>=0.082</m:t>
-                    </m:r>
-                  </m:oMath>
-                </a14:m>
-                <a:r>
-                  <a:rPr sz="1000" b="0" i="0" baseline="0" dirty="0">
-                    <a:latin typeface="Calibri"/>
-                  </a:rPr>
-                  <a:t>; mean </a:t>
-                </a:r>
-                <a14:m>
-                  <m:oMath xmlns:m="http://schemas.openxmlformats.org/officeDocument/2006/math">
-                    <m:sSubSup>
-                      <m:sSubSupPr>
-                        <m:ctrlPr>
-                          <a:rPr lang="en-US" sz="1000" b="0" i="0" baseline="0" dirty="0">
-                            <a:latin typeface="Cambria Math" panose="02040503050406030204" pitchFamily="18" charset="0"/>
-                          </a:rPr>
-                        </m:ctrlPr>
-                      </m:sSubSupPr>
-                      <m:e>
-                        <m:r>
-                          <a:rPr lang="en-US" sz="1000" b="0" i="0" baseline="0" dirty="0">
-                            <a:latin typeface="Cambria Math" panose="02040503050406030204" pitchFamily="18" charset="0"/>
-                          </a:rPr>
-                          <m:t>𝐻</m:t>
-                        </m:r>
-                      </m:e>
-                      <m:sub>
-                        <m:r>
-                          <m:rPr>
-                            <m:sty m:val="p"/>
-                          </m:rPr>
-                          <a:rPr lang="en-US" sz="1000" b="0" i="0" baseline="0" dirty="0">
-                            <a:latin typeface="Cambria Math" panose="02040503050406030204" pitchFamily="18" charset="0"/>
-                          </a:rPr>
-                          <m:t>sort</m:t>
-                        </m:r>
-                      </m:sub>
-                      <m:sup>
-                        <m:r>
-                          <m:rPr>
-                            <m:sty m:val="p"/>
-                          </m:rPr>
-                          <a:rPr lang="en-US" sz="1000" b="0" i="0" baseline="0" dirty="0">
-                            <a:latin typeface="Cambria Math" panose="02040503050406030204" pitchFamily="18" charset="0"/>
-                          </a:rPr>
-                          <m:t>emp</m:t>
-                        </m:r>
-                      </m:sup>
-                    </m:sSubSup>
-                  </m:oMath>
-                </a14:m>
-                <a:r>
-                  <a:rPr sz="1000" b="0" i="0" baseline="0" dirty="0">
-                    <a:latin typeface="Calibri"/>
-                  </a:rPr>
-                  <a:t> </a:t>
-                </a:r>
-                <a14:m>
-                  <m:oMath xmlns:m="http://schemas.openxmlformats.org/officeDocument/2006/math">
-                    <m:r>
-                      <a:rPr lang="en-US" sz="1000" b="0" i="0" baseline="0" dirty="0" smtClean="0">
-                        <a:latin typeface="Cambria Math" panose="02040503050406030204" pitchFamily="18" charset="0"/>
-                      </a:rPr>
-                      <m:t>=0.064</m:t>
-                    </m:r>
-                  </m:oMath>
-                </a14:m>
-                <a:r>
-                  <a:rPr sz="1000" b="0" i="0" baseline="0" dirty="0">
-                    <a:latin typeface="Calibri"/>
-                  </a:rPr>
-                  <a:t>.</a:t>
-                </a:r>
-              </a:p>
-              <a:p>
-                <a:pPr>
-                  <a:buChar char="•"/>
-                </a:pPr>
-                <a:r>
-                  <a:rPr sz="1000" b="0" i="0" baseline="0" dirty="0">
-                    <a:latin typeface="Calibri"/>
-                  </a:rPr>
-                  <a:t>  Per-season: 11/11 seasons at </a:t>
-                </a:r>
-                <a14:m>
-                  <m:oMath xmlns:m="http://schemas.openxmlformats.org/officeDocument/2006/math">
-                    <m:sSup>
-                      <m:sSupPr>
-                        <m:ctrlPr>
-                          <a:rPr lang="en-US" sz="1000" b="0" i="0" baseline="0" dirty="0">
-                            <a:latin typeface="Cambria Math" panose="02040503050406030204" pitchFamily="18" charset="0"/>
-                          </a:rPr>
-                        </m:ctrlPr>
-                      </m:sSupPr>
-                      <m:e>
-                        <m:r>
-                          <a:rPr lang="en-US" sz="1000" b="0" i="0" baseline="0" dirty="0">
-                            <a:latin typeface="Cambria Math" panose="02040503050406030204" pitchFamily="18" charset="0"/>
-                          </a:rPr>
-                          <m:t>𝜌</m:t>
-                        </m:r>
-                      </m:e>
-                      <m:sup>
-                        <m:r>
-                          <a:rPr lang="en-US" sz="1000" b="0" i="0" baseline="0" dirty="0">
-                            <a:latin typeface="Cambria Math" panose="02040503050406030204" pitchFamily="18" charset="0"/>
-                          </a:rPr>
-                          <m:t>∗</m:t>
-                        </m:r>
-                      </m:sup>
-                    </m:sSup>
-                    <m:r>
-                      <a:rPr lang="en-US" sz="1000" b="0" i="0" baseline="0" dirty="0">
-                        <a:latin typeface="Cambria Math" panose="02040503050406030204" pitchFamily="18" charset="0"/>
-                      </a:rPr>
-                      <m:t>=0</m:t>
-                    </m:r>
-                  </m:oMath>
-                </a14:m>
-                <a:r>
-                  <a:rPr sz="1000" b="0" i="0" baseline="0" dirty="0">
-                    <a:latin typeface="Calibri"/>
-                  </a:rPr>
-                  <a:t>; all at </a:t>
-                </a:r>
-                <a14:m>
-                  <m:oMath xmlns:m="http://schemas.openxmlformats.org/officeDocument/2006/math">
-                    <m:sSup>
-                      <m:sSupPr>
-                        <m:ctrlPr>
-                          <a:rPr lang="en-US" sz="1000" b="0" i="0" baseline="0" dirty="0">
-                            <a:latin typeface="Cambria Math" panose="02040503050406030204" pitchFamily="18" charset="0"/>
-                          </a:rPr>
-                        </m:ctrlPr>
-                      </m:sSupPr>
-                      <m:e>
-                        <m:r>
-                          <a:rPr lang="en-US" sz="1000" b="0" i="0" baseline="0" dirty="0">
-                            <a:latin typeface="Cambria Math" panose="02040503050406030204" pitchFamily="18" charset="0"/>
-                          </a:rPr>
-                          <m:t>𝜌</m:t>
-                        </m:r>
-                      </m:e>
-                      <m:sup>
-                        <m:r>
-                          <a:rPr lang="en-US" sz="1000" b="0" i="0" baseline="0" dirty="0">
-                            <a:latin typeface="Cambria Math" panose="02040503050406030204" pitchFamily="18" charset="0"/>
-                          </a:rPr>
-                          <m:t>∗</m:t>
-                        </m:r>
-                      </m:sup>
-                    </m:sSup>
-                    <m:r>
-                      <a:rPr lang="en-US" sz="1000" b="0" i="0" baseline="0" dirty="0">
-                        <a:latin typeface="Cambria Math" panose="02040503050406030204" pitchFamily="18" charset="0"/>
-                      </a:rPr>
-                      <m:t>=0</m:t>
-                    </m:r>
-                  </m:oMath>
-                </a14:m>
-                <a:r>
-                  <a:rPr sz="1000" b="0" i="0" baseline="0" dirty="0">
-                    <a:latin typeface="Calibri"/>
-                  </a:rPr>
-                  <a:t>.</a:t>
-                </a:r>
-              </a:p>
-              <a:p>
-                <a:pPr>
-                  <a:buChar char="•"/>
-                </a:pPr>
-                <a:r>
-                  <a:rPr sz="1000" b="0" i="0" baseline="0" dirty="0">
-                    <a:latin typeface="Calibri"/>
-                  </a:rPr>
-                  <a:t>  Legacy reference </a:t>
-                </a:r>
-                <a14:m>
-                  <m:oMath xmlns:m="http://schemas.openxmlformats.org/officeDocument/2006/math">
-                    <m:r>
-                      <a:rPr lang="en-US" sz="1000" b="0" i="0" baseline="0" dirty="0" smtClean="0">
-                        <a:latin typeface="Cambria Math" panose="02040503050406030204" pitchFamily="18" charset="0"/>
-                      </a:rPr>
-                      <m:t>𝜌</m:t>
-                    </m:r>
-                    <m:r>
-                      <a:rPr lang="en-US" sz="1000" b="0" i="0" baseline="0" dirty="0" smtClean="0">
-                        <a:latin typeface="Cambria Math" panose="02040503050406030204" pitchFamily="18" charset="0"/>
-                      </a:rPr>
-                      <m:t>=0.5</m:t>
-                    </m:r>
-                  </m:oMath>
-                </a14:m>
-                <a:r>
-                  <a:rPr sz="1000" b="0" i="0" baseline="0" dirty="0">
-                    <a:latin typeface="Calibri"/>
-                  </a:rPr>
-                  <a:t>: mean </a:t>
-                </a:r>
-                <a14:m>
-                  <m:oMath xmlns:m="http://schemas.openxmlformats.org/officeDocument/2006/math">
-                    <m:d>
-                      <m:dPr>
-                        <m:begChr m:val="|"/>
-                        <m:endChr m:val="|"/>
-                        <m:ctrlPr>
-                          <a:rPr lang="en-US" sz="1000" b="0" i="0" baseline="0" dirty="0">
-                            <a:latin typeface="Cambria Math" panose="02040503050406030204" pitchFamily="18" charset="0"/>
-                          </a:rPr>
-                        </m:ctrlPr>
-                      </m:dPr>
-                      <m:e>
-                        <m:r>
-                          <a:rPr lang="en-US" sz="1000" b="0" i="0" baseline="0" dirty="0">
-                            <a:latin typeface="Cambria Math" panose="02040503050406030204" pitchFamily="18" charset="0"/>
-                          </a:rPr>
-                          <m:t>𝑒𝑟𝑟𝑜𝑟</m:t>
-                        </m:r>
-                      </m:e>
-                    </m:d>
-                    <m:r>
-                      <a:rPr lang="en-US" sz="1000" b="0" i="0" baseline="0" dirty="0">
-                        <a:latin typeface="Cambria Math" panose="02040503050406030204" pitchFamily="18" charset="0"/>
-                      </a:rPr>
-                      <m:t>≈0.112</m:t>
-                    </m:r>
-                  </m:oMath>
-                </a14:m>
-                <a:r>
-                  <a:rPr sz="1000" b="0" i="0" baseline="0" dirty="0">
-                    <a:latin typeface="Calibri"/>
-                  </a:rPr>
-                  <a:t> vs </a:t>
-                </a:r>
-                <a14:m>
-                  <m:oMath xmlns:m="http://schemas.openxmlformats.org/officeDocument/2006/math">
-                    <m:r>
-                      <a:rPr lang="en-US" sz="1000" b="0" i="0" baseline="0" dirty="0" smtClean="0">
-                        <a:latin typeface="Cambria Math" panose="02040503050406030204" pitchFamily="18" charset="0"/>
-                      </a:rPr>
-                      <m:t>≈0.018</m:t>
-                    </m:r>
-                  </m:oMath>
-                </a14:m>
-                <a:r>
-                  <a:rPr sz="1000" b="0" i="0" baseline="0" dirty="0">
-                    <a:latin typeface="Calibri"/>
-                  </a:rPr>
-                  <a:t> at </a:t>
-                </a:r>
-                <a14:m>
-                  <m:oMath xmlns:m="http://schemas.openxmlformats.org/officeDocument/2006/math">
-                    <m:sSup>
-                      <m:sSupPr>
-                        <m:ctrlPr>
-                          <a:rPr lang="en-US" sz="1000" b="0" i="0" baseline="0" dirty="0">
-                            <a:latin typeface="Cambria Math" panose="02040503050406030204" pitchFamily="18" charset="0"/>
-                          </a:rPr>
-                        </m:ctrlPr>
-                      </m:sSupPr>
-                      <m:e>
-                        <m:r>
-                          <a:rPr lang="en-US" sz="1000" b="0" i="0" baseline="0" dirty="0">
-                            <a:latin typeface="Cambria Math" panose="02040503050406030204" pitchFamily="18" charset="0"/>
-                          </a:rPr>
-                          <m:t>𝜌</m:t>
-                        </m:r>
-                      </m:e>
-                      <m:sup>
-                        <m:r>
-                          <a:rPr lang="en-US" sz="1000" b="0" i="0" baseline="0" dirty="0">
-                            <a:latin typeface="Cambria Math" panose="02040503050406030204" pitchFamily="18" charset="0"/>
-                          </a:rPr>
-                          <m:t>∗</m:t>
-                        </m:r>
-                      </m:sup>
-                    </m:sSup>
-                  </m:oMath>
-                </a14:m>
-                <a:r>
-                  <a:rPr sz="1000" b="0" i="0" baseline="0" dirty="0">
-                    <a:latin typeface="Calibri"/>
-                  </a:rPr>
-                  <a:t>.</a:t>
-                </a:r>
-              </a:p>
-              <a:p>
-                <a:pPr>
-                  <a:buChar char="•"/>
-                </a:pPr>
-                <a:r>
-                  <a:rPr sz="1000" b="0" i="0" baseline="0" dirty="0">
-                    <a:latin typeface="Calibri"/>
-                  </a:rPr>
-                  <a:t>  Figure bottom-right inset: per-season </a:t>
-                </a:r>
-                <a14:m>
-                  <m:oMath xmlns:m="http://schemas.openxmlformats.org/officeDocument/2006/math">
-                    <m:sSup>
-                      <m:sSupPr>
-                        <m:ctrlPr>
-                          <a:rPr lang="en-US" sz="1000" b="0" i="0" baseline="0" dirty="0">
-                            <a:latin typeface="Cambria Math" panose="02040503050406030204" pitchFamily="18" charset="0"/>
-                          </a:rPr>
-                        </m:ctrlPr>
-                      </m:sSupPr>
-                      <m:e>
-                        <m:r>
-                          <a:rPr lang="en-US" sz="1000" b="0" i="0" baseline="0" dirty="0">
-                            <a:latin typeface="Cambria Math" panose="02040503050406030204" pitchFamily="18" charset="0"/>
-                          </a:rPr>
-                          <m:t>𝜌</m:t>
-                        </m:r>
-                      </m:e>
-                      <m:sup>
-                        <m:r>
-                          <a:rPr lang="en-US" sz="1000" b="0" i="0" baseline="0" dirty="0">
-                            <a:latin typeface="Cambria Math" panose="02040503050406030204" pitchFamily="18" charset="0"/>
-                          </a:rPr>
-                          <m:t>∗</m:t>
-                        </m:r>
-                      </m:sup>
-                    </m:sSup>
-                  </m:oMath>
-                </a14:m>
-                <a:r>
-                  <a:rPr sz="1000" b="0" i="0" baseline="0" dirty="0">
-                    <a:latin typeface="Calibri"/>
-                  </a:rPr>
-                  <a:t> — flat at </a:t>
-                </a:r>
-                <a14:m>
-                  <m:oMath xmlns:m="http://schemas.openxmlformats.org/officeDocument/2006/math">
-                    <m:r>
-                      <a:rPr lang="en-US" sz="1000" b="0" i="0" baseline="0" dirty="0" smtClean="0">
-                        <a:latin typeface="Cambria Math" panose="02040503050406030204" pitchFamily="18" charset="0"/>
-                      </a:rPr>
-                      <m:t>0</m:t>
-                    </m:r>
-                  </m:oMath>
-                </a14:m>
-                <a:r>
-                  <a:rPr sz="1000" b="0" i="0" baseline="0" dirty="0">
-                    <a:latin typeface="Calibri"/>
-                  </a:rPr>
-                  <a:t> all seasons on hero panel.</a:t>
-                </a:r>
-              </a:p>
-              <a:p>
-                <a:pPr>
-                  <a:buChar char="•"/>
-                </a:pPr>
-                <a:r>
-                  <a:rPr sz="1000" b="0" i="0" baseline="0" dirty="0">
-                    <a:latin typeface="Calibri"/>
-                  </a:rPr>
-                  <a:t>  </a:t>
-                </a:r>
-                <a14:m>
-                  <m:oMath xmlns:m="http://schemas.openxmlformats.org/officeDocument/2006/math">
-                    <m:sSup>
-                      <m:sSupPr>
-                        <m:ctrlPr>
-                          <a:rPr lang="en-US" sz="1000" b="0" i="0" baseline="0" dirty="0">
-                            <a:latin typeface="Cambria Math" panose="02040503050406030204" pitchFamily="18" charset="0"/>
-                          </a:rPr>
-                        </m:ctrlPr>
-                      </m:sSupPr>
-                      <m:e>
-                        <m:r>
-                          <a:rPr lang="en-US" sz="1000" b="0" i="0" baseline="0" dirty="0">
-                            <a:latin typeface="Cambria Math" panose="02040503050406030204" pitchFamily="18" charset="0"/>
-                          </a:rPr>
-                          <m:t>𝜌</m:t>
-                        </m:r>
-                      </m:e>
-                      <m:sup>
-                        <m:r>
-                          <a:rPr lang="en-US" sz="1000" b="0" i="0" baseline="0" dirty="0">
-                            <a:latin typeface="Cambria Math" panose="02040503050406030204" pitchFamily="18" charset="0"/>
-                          </a:rPr>
-                          <m:t>∗</m:t>
-                        </m:r>
-                      </m:sup>
-                    </m:sSup>
-                    <m:r>
-                      <a:rPr lang="en-US" sz="1000" b="0" i="0" baseline="0" dirty="0">
-                        <a:latin typeface="Cambria Math" panose="02040503050406030204" pitchFamily="18" charset="0"/>
-                      </a:rPr>
-                      <m:t>=0</m:t>
-                    </m:r>
-                  </m:oMath>
-                </a14:m>
-                <a:r>
-                  <a:rPr sz="1000" b="0" i="0" baseline="0" dirty="0">
-                    <a:latin typeface="Calibri"/>
-                  </a:rPr>
-                  <a:t> — what we DO say: on the locked hero panel, the LG ASSIGN homophily knob calibrates to zero (11/11 seasons); empirical </a:t>
-                </a:r>
-                <a14:m>
-                  <m:oMath xmlns:m="http://schemas.openxmlformats.org/officeDocument/2006/math">
-                    <m:sSub>
-                      <m:sSubPr>
-                        <m:ctrlPr>
-                          <a:rPr lang="en-US" sz="1000" b="0" i="0" baseline="0" dirty="0">
-                            <a:latin typeface="Cambria Math" panose="02040503050406030204" pitchFamily="18" charset="0"/>
-                          </a:rPr>
-                        </m:ctrlPr>
-                      </m:sSubPr>
-                      <m:e>
-                        <m:r>
-                          <a:rPr lang="en-US" sz="1000" b="0" i="0" baseline="0" dirty="0">
-                            <a:latin typeface="Cambria Math" panose="02040503050406030204" pitchFamily="18" charset="0"/>
-                          </a:rPr>
-                          <m:t>𝐻</m:t>
-                        </m:r>
-                      </m:e>
-                      <m:sub>
-                        <m:r>
-                          <m:rPr>
-                            <m:sty m:val="p"/>
-                          </m:rPr>
-                          <a:rPr lang="en-US" sz="1000" b="0" i="0" baseline="0" dirty="0">
-                            <a:latin typeface="Cambria Math" panose="02040503050406030204" pitchFamily="18" charset="0"/>
-                          </a:rPr>
-                          <m:t>sort</m:t>
-                        </m:r>
-                      </m:sub>
-                    </m:sSub>
-                    <m:r>
-                      <a:rPr lang="en-US" sz="1000" b="0" i="0" baseline="0" dirty="0">
-                        <a:latin typeface="Cambria Math" panose="02040503050406030204" pitchFamily="18" charset="0"/>
-                      </a:rPr>
-                      <m:t>≈0.064</m:t>
-                    </m:r>
-                  </m:oMath>
-                </a14:m>
-                <a:r>
-                  <a:rPr sz="1000" b="0" i="0" baseline="0" dirty="0">
-                    <a:latin typeface="Calibri"/>
-                  </a:rPr>
-                  <a:t> (</a:t>
-                </a:r>
-                <a14:m>
-                  <m:oMath xmlns:m="http://schemas.openxmlformats.org/officeDocument/2006/math">
-                    <m:r>
-                      <a:rPr lang="en-US" sz="1000" b="0" i="0" baseline="0" dirty="0" smtClean="0">
-                        <a:latin typeface="Cambria Math" panose="02040503050406030204" pitchFamily="18" charset="0"/>
-                      </a:rPr>
-                      <m:t>≈0.0642059</m:t>
-                    </m:r>
-                  </m:oMath>
-                </a14:m>
-                <a:r>
-                  <a:rPr sz="1000" b="0" i="0" baseline="0" dirty="0">
-                    <a:latin typeface="Calibri"/>
-                  </a:rPr>
-                  <a:t> on </a:t>
-                </a:r>
-                <a14:m>
-                  <m:oMath xmlns:m="http://schemas.openxmlformats.org/officeDocument/2006/math">
-                    <m:d>
-                      <m:dPr>
-                        <m:begChr m:val="["/>
-                        <m:endChr m:val="]"/>
-                        <m:ctrlPr>
-                          <a:rPr lang="en-US" sz="1000" b="0" i="0" baseline="0" dirty="0">
-                            <a:latin typeface="Cambria Math" panose="02040503050406030204" pitchFamily="18" charset="0"/>
-                          </a:rPr>
-                        </m:ctrlPr>
-                      </m:dPr>
-                      <m:e>
-                        <m:r>
-                          <a:rPr lang="en-US" sz="1000" b="0" i="0" baseline="0" dirty="0">
-                            <a:latin typeface="Cambria Math" panose="02040503050406030204" pitchFamily="18" charset="0"/>
-                          </a:rPr>
-                          <m:t>0,1</m:t>
-                        </m:r>
-                      </m:e>
-                    </m:d>
-                  </m:oMath>
-                </a14:m>
-                <a:r>
-                  <a:rPr sz="1000" b="0" i="0" baseline="0" dirty="0">
-                    <a:latin typeface="Calibri"/>
-                  </a:rPr>
-                  <a:t> scale); sim at </a:t>
-                </a:r>
-                <a14:m>
-                  <m:oMath xmlns:m="http://schemas.openxmlformats.org/officeDocument/2006/math">
-                    <m:sSup>
-                      <m:sSupPr>
-                        <m:ctrlPr>
-                          <a:rPr lang="en-US" sz="1000" b="0" i="0" baseline="0" dirty="0">
-                            <a:latin typeface="Cambria Math" panose="02040503050406030204" pitchFamily="18" charset="0"/>
-                          </a:rPr>
-                        </m:ctrlPr>
-                      </m:sSupPr>
-                      <m:e>
-                        <m:r>
-                          <a:rPr lang="en-US" sz="1000" b="0" i="0" baseline="0" dirty="0">
-                            <a:latin typeface="Cambria Math" panose="02040503050406030204" pitchFamily="18" charset="0"/>
-                          </a:rPr>
-                          <m:t>𝜌</m:t>
-                        </m:r>
-                      </m:e>
-                      <m:sup>
-                        <m:r>
-                          <a:rPr lang="en-US" sz="1000" b="0" i="0" baseline="0" dirty="0">
-                            <a:latin typeface="Cambria Math" panose="02040503050406030204" pitchFamily="18" charset="0"/>
-                          </a:rPr>
-                          <m:t>∗</m:t>
-                        </m:r>
-                      </m:sup>
-                    </m:sSup>
-                  </m:oMath>
-                </a14:m>
-                <a:r>
-                  <a:rPr sz="1000" b="0" i="0" baseline="0" dirty="0">
-                    <a:latin typeface="Calibri"/>
-                  </a:rPr>
-                  <a:t> slightly high (</a:t>
-                </a:r>
-                <a14:m>
-                  <m:oMath xmlns:m="http://schemas.openxmlformats.org/officeDocument/2006/math">
-                    <m:r>
-                      <a:rPr lang="en-US" sz="1000" b="0" i="0" baseline="0" dirty="0" smtClean="0">
-                        <a:latin typeface="Cambria Math" panose="02040503050406030204" pitchFamily="18" charset="0"/>
-                      </a:rPr>
-                      <m:t>≈0.0821529</m:t>
-                    </m:r>
-                  </m:oMath>
-                </a14:m>
-                <a:r>
-                  <a:rPr sz="1000" b="0" i="0" baseline="0" dirty="0">
-                    <a:latin typeface="Calibri"/>
-                  </a:rPr>
-                  <a:t>); turning </a:t>
-                </a:r>
-                <a14:m>
-                  <m:oMath xmlns:m="http://schemas.openxmlformats.org/officeDocument/2006/math">
-                    <m:r>
-                      <a:rPr lang="en-US" sz="1000" b="0" i="0" baseline="0" dirty="0" smtClean="0">
-                        <a:latin typeface="Cambria Math" panose="02040503050406030204" pitchFamily="18" charset="0"/>
-                      </a:rPr>
-                      <m:t>𝜌</m:t>
-                    </m:r>
-                  </m:oMath>
-                </a14:m>
-                <a:r>
-                  <a:rPr sz="1000" b="0" i="0" baseline="0" dirty="0">
-                    <a:latin typeface="Calibri"/>
-                  </a:rPr>
-                  <a:t> up overshoots (see legacy </a:t>
-                </a:r>
-                <a14:m>
-                  <m:oMath xmlns:m="http://schemas.openxmlformats.org/officeDocument/2006/math">
-                    <m:r>
-                      <a:rPr lang="en-US" sz="1000" b="0" i="0" baseline="0" dirty="0" smtClean="0">
-                        <a:latin typeface="Cambria Math" panose="02040503050406030204" pitchFamily="18" charset="0"/>
-                      </a:rPr>
-                      <m:t>𝜌</m:t>
-                    </m:r>
-                    <m:r>
-                      <a:rPr lang="en-US" sz="1000" b="0" i="0" baseline="0" dirty="0" smtClean="0">
-                        <a:latin typeface="Cambria Math" panose="02040503050406030204" pitchFamily="18" charset="0"/>
-                      </a:rPr>
-                      <m:t>=0.5</m:t>
-                    </m:r>
-                  </m:oMath>
-                </a14:m>
-                <a:r>
-                  <a:rPr sz="1000" b="0" i="0" baseline="0" dirty="0">
-                    <a:latin typeface="Calibri"/>
-                  </a:rPr>
-                  <a:t> bullet).</a:t>
-                </a:r>
-              </a:p>
-              <a:p>
-                <a:pPr>
-                  <a:buChar char="•"/>
-                </a:pPr>
-                <a:r>
-                  <a:rPr sz="1000" b="0" i="0" baseline="0" dirty="0">
-                    <a:latin typeface="Calibri"/>
-                  </a:rPr>
-                  <a:t>  </a:t>
-                </a:r>
-                <a14:m>
-                  <m:oMath xmlns:m="http://schemas.openxmlformats.org/officeDocument/2006/math">
-                    <m:sSup>
-                      <m:sSupPr>
-                        <m:ctrlPr>
-                          <a:rPr lang="en-US" sz="1000" b="0" i="0" baseline="0" dirty="0">
-                            <a:latin typeface="Cambria Math" panose="02040503050406030204" pitchFamily="18" charset="0"/>
-                          </a:rPr>
-                        </m:ctrlPr>
-                      </m:sSupPr>
-                      <m:e>
-                        <m:r>
-                          <a:rPr lang="en-US" sz="1000" b="0" i="0" baseline="0" dirty="0">
-                            <a:latin typeface="Cambria Math" panose="02040503050406030204" pitchFamily="18" charset="0"/>
-                          </a:rPr>
-                          <m:t>𝜌</m:t>
-                        </m:r>
-                      </m:e>
-                      <m:sup>
-                        <m:r>
-                          <a:rPr lang="en-US" sz="1000" b="0" i="0" baseline="0" dirty="0">
-                            <a:latin typeface="Cambria Math" panose="02040503050406030204" pitchFamily="18" charset="0"/>
-                          </a:rPr>
-                          <m:t>∗</m:t>
-                        </m:r>
-                      </m:sup>
-                    </m:sSup>
-                    <m:r>
-                      <a:rPr lang="en-US" sz="1000" b="0" i="0" baseline="0" dirty="0">
-                        <a:latin typeface="Cambria Math" panose="02040503050406030204" pitchFamily="18" charset="0"/>
-                      </a:rPr>
-                      <m:t>=0</m:t>
-                    </m:r>
-                  </m:oMath>
-                </a14:m>
-                <a:r>
-                  <a:rPr sz="1000" b="0" i="0" baseline="0" dirty="0">
-                    <a:latin typeface="Calibri"/>
-                  </a:rPr>
-                  <a:t> — what we DO NOT say: NCAA has no team formation; Duke and a weak D-I school draw from the same talent pool; real-world assortativity is absent; Hero inverted-U / </a:t>
-                </a:r>
-                <a14:m>
-                  <m:oMath xmlns:m="http://schemas.openxmlformats.org/officeDocument/2006/math">
-                    <m:r>
-                      <a:rPr lang="en-US" sz="1000" b="0" i="0" baseline="0" dirty="0" smtClean="0">
-                        <a:latin typeface="Cambria Math" panose="02040503050406030204" pitchFamily="18" charset="0"/>
-                      </a:rPr>
-                      <m:t>𝜆</m:t>
-                    </m:r>
-                  </m:oMath>
-                </a14:m>
-                <a:r>
-                  <a:rPr sz="1000" b="0" i="0" baseline="0" dirty="0">
-                    <a:latin typeface="Calibri"/>
-                  </a:rPr>
-                  <a:t> / SELECT story is dead.</a:t>
-                </a:r>
-              </a:p>
-              <a:p>
-                <a:pPr>
-                  <a:buChar char="•"/>
-                </a:pPr>
-                <a:r>
-                  <a:rPr sz="1000" b="0" i="0" baseline="0" dirty="0">
-                    <a:latin typeface="Calibri"/>
-                  </a:rPr>
-                  <a:t>  </a:t>
-                </a:r>
-                <a14:m>
-                  <m:oMath xmlns:m="http://schemas.openxmlformats.org/officeDocument/2006/math">
-                    <m:sSub>
-                      <m:sSubPr>
-                        <m:ctrlPr>
-                          <a:rPr lang="en-US" sz="1000" b="0" i="0" baseline="0" dirty="0">
-                            <a:latin typeface="Cambria Math" panose="02040503050406030204" pitchFamily="18" charset="0"/>
-                          </a:rPr>
-                        </m:ctrlPr>
-                      </m:sSubPr>
-                      <m:e>
-                        <m:r>
-                          <a:rPr lang="en-US" sz="1000" b="0" i="0" baseline="0" dirty="0">
-                            <a:latin typeface="Cambria Math" panose="02040503050406030204" pitchFamily="18" charset="0"/>
-                          </a:rPr>
-                          <m:t>𝐻</m:t>
-                        </m:r>
-                      </m:e>
-                      <m:sub>
-                        <m:r>
-                          <m:rPr>
-                            <m:sty m:val="p"/>
-                          </m:rPr>
-                          <a:rPr lang="en-US" sz="1000" b="0" i="0" baseline="0" dirty="0">
-                            <a:latin typeface="Cambria Math" panose="02040503050406030204" pitchFamily="18" charset="0"/>
-                          </a:rPr>
-                          <m:t>sort</m:t>
-                        </m:r>
-                      </m:sub>
-                    </m:sSub>
-                  </m:oMath>
-                </a14:m>
-                <a:r>
-                  <a:rPr sz="1000" b="0" i="0" baseline="0" dirty="0">
-                    <a:latin typeface="Calibri"/>
-                  </a:rPr>
-                  <a:t> is realized sorting on a fixed roster partition (VECTOR lock) — not the generative </a:t>
-                </a:r>
-                <a14:m>
-                  <m:oMath xmlns:m="http://schemas.openxmlformats.org/officeDocument/2006/math">
-                    <m:r>
-                      <a:rPr lang="en-US" sz="1000" b="0" i="0" baseline="0" dirty="0" smtClean="0">
-                        <a:latin typeface="Cambria Math" panose="02040503050406030204" pitchFamily="18" charset="0"/>
-                      </a:rPr>
-                      <m:t>𝜌</m:t>
-                    </m:r>
-                  </m:oMath>
-                </a14:m>
-                <a:r>
-                  <a:rPr sz="1000" b="0" i="0" baseline="0" dirty="0">
-                    <a:latin typeface="Calibri"/>
-                  </a:rPr>
-                  <a:t> knob. Box QC lowered measured </a:t>
-                </a:r>
-                <a14:m>
-                  <m:oMath xmlns:m="http://schemas.openxmlformats.org/officeDocument/2006/math">
-                    <m:sSub>
-                      <m:sSubPr>
-                        <m:ctrlPr>
-                          <a:rPr lang="en-US" sz="1000" b="0" i="0" baseline="0" dirty="0">
-                            <a:latin typeface="Cambria Math" panose="02040503050406030204" pitchFamily="18" charset="0"/>
-                          </a:rPr>
-                        </m:ctrlPr>
-                      </m:sSubPr>
-                      <m:e>
-                        <m:r>
-                          <a:rPr lang="en-US" sz="1000" b="0" i="0" baseline="0" dirty="0">
-                            <a:latin typeface="Cambria Math" panose="02040503050406030204" pitchFamily="18" charset="0"/>
-                          </a:rPr>
-                          <m:t>𝐻</m:t>
-                        </m:r>
-                      </m:e>
-                      <m:sub>
-                        <m:r>
-                          <m:rPr>
-                            <m:sty m:val="p"/>
-                          </m:rPr>
-                          <a:rPr lang="en-US" sz="1000" b="0" i="0" baseline="0" dirty="0">
-                            <a:latin typeface="Cambria Math" panose="02040503050406030204" pitchFamily="18" charset="0"/>
-                          </a:rPr>
-                          <m:t>sort</m:t>
-                        </m:r>
-                      </m:sub>
-                    </m:sSub>
-                  </m:oMath>
-                </a14:m>
-                <a:r>
-                  <a:rPr sz="1000" b="0" i="0" baseline="0" dirty="0">
-                    <a:latin typeface="Calibri"/>
-                  </a:rPr>
-                  <a:t> vs pre-QC (</a:t>
-                </a:r>
-                <a14:m>
-                  <m:oMath xmlns:m="http://schemas.openxmlformats.org/officeDocument/2006/math">
-                    <m:r>
-                      <a:rPr lang="en-US" sz="1000" b="0" i="0" baseline="0" dirty="0" smtClean="0">
-                        <a:latin typeface="Cambria Math" panose="02040503050406030204" pitchFamily="18" charset="0"/>
-                      </a:rPr>
-                      <m:t>∼0.10→∼0.06</m:t>
-                    </m:r>
-                  </m:oMath>
-                </a14:m>
-                <a:r>
-                  <a:rPr sz="1000" b="0" i="0" baseline="0" dirty="0">
-                    <a:latin typeface="Calibri"/>
-                  </a:rPr>
-                  <a:t>); modest </a:t>
-                </a:r>
-                <a14:m>
-                  <m:oMath xmlns:m="http://schemas.openxmlformats.org/officeDocument/2006/math">
-                    <m:r>
-                      <a:rPr lang="en-US" sz="1000" b="0" i="0" baseline="0" dirty="0" smtClean="0">
-                        <a:latin typeface="Cambria Math" panose="02040503050406030204" pitchFamily="18" charset="0"/>
-                      </a:rPr>
-                      <m:t>≠</m:t>
-                    </m:r>
-                  </m:oMath>
-                </a14:m>
-                <a:r>
-                  <a:rPr sz="1000" b="0" i="0" baseline="0" dirty="0">
-                    <a:latin typeface="Calibri"/>
-                  </a:rPr>
-                  <a:t> zero. Contrast: slide</a:t>
-                </a:r>
-                <a:r>
-                  <a:rPr lang="en-US" sz="1000" b="0" i="0" baseline="0" dirty="0">
-                    <a:latin typeface="Calibri"/>
-                  </a:rPr>
-                  <a:t> 6 </a:t>
-                </a:r>
-                <a:r>
-                  <a:rPr sz="1000" b="0" i="0" baseline="0" dirty="0">
-                    <a:latin typeface="Calibri"/>
-                  </a:rPr>
-                  <a:t> </a:t>
-                </a:r>
-                <a14:m>
-                  <m:oMath xmlns:m="http://schemas.openxmlformats.org/officeDocument/2006/math">
-                    <m:r>
-                      <a:rPr lang="en-US" sz="1000" b="0" i="0" baseline="0" dirty="0" smtClean="0">
-                        <a:latin typeface="Cambria Math" panose="02040503050406030204" pitchFamily="18" charset="0"/>
-                      </a:rPr>
-                      <m:t>𝑝𝑝𝑚</m:t>
-                    </m:r>
-                    <m:r>
-                      <a:rPr lang="en-US" sz="1000" b="0" i="0" baseline="0" dirty="0" smtClean="0">
-                        <a:latin typeface="Cambria Math" panose="02040503050406030204" pitchFamily="18" charset="0"/>
-                      </a:rPr>
-                      <m:t>0</m:t>
-                    </m:r>
-                    <m:r>
-                      <a:rPr lang="en-US" sz="1000" b="0" i="0" baseline="0" dirty="0" smtClean="0">
-                        <a:latin typeface="Cambria Math" panose="02040503050406030204" pitchFamily="18" charset="0"/>
-                      </a:rPr>
-                      <m:t>𝑙𝑡</m:t>
-                    </m:r>
-                    <m:r>
-                      <a:rPr lang="en-US" sz="1000" b="0" i="0" baseline="0" dirty="0" smtClean="0">
-                        <a:latin typeface="Cambria Math" panose="02040503050406030204" pitchFamily="18" charset="0"/>
-                      </a:rPr>
-                      <m:t>20</m:t>
-                    </m:r>
-                  </m:oMath>
-                </a14:m>
-                <a:r>
-                  <a:rPr sz="1000" b="0" i="0" baseline="0" dirty="0">
-                    <a:latin typeface="Calibri"/>
-                  </a:rPr>
-                  <a:t> panel.</a:t>
-                </a:r>
-              </a:p>
-              <a:p>
-                <a:pPr>
-                  <a:buChar char="•"/>
-                </a:pPr>
-                <a:r>
-                  <a:rPr sz="1000" b="0" i="0" baseline="0" dirty="0">
-                    <a:latin typeface="Calibri"/>
-                  </a:rPr>
-                  <a:t>  VECTOR lock: </a:t>
-                </a:r>
-                <a14:m>
-                  <m:oMath xmlns:m="http://schemas.openxmlformats.org/officeDocument/2006/math">
-                    <m:sSub>
-                      <m:sSubPr>
-                        <m:ctrlPr>
-                          <a:rPr lang="en-US" sz="1000" b="0" i="0" baseline="0" dirty="0">
-                            <a:latin typeface="Cambria Math" panose="02040503050406030204" pitchFamily="18" charset="0"/>
-                          </a:rPr>
-                        </m:ctrlPr>
-                      </m:sSubPr>
-                      <m:e>
-                        <m:r>
-                          <a:rPr lang="en-US" sz="1000" b="0" i="0" baseline="0" dirty="0">
-                            <a:latin typeface="Cambria Math" panose="02040503050406030204" pitchFamily="18" charset="0"/>
-                          </a:rPr>
-                          <m:t>𝐻</m:t>
-                        </m:r>
-                      </m:e>
-                      <m:sub>
-                        <m:r>
-                          <a:rPr lang="en-US" sz="1000" b="0" i="0" baseline="0" dirty="0">
-                            <a:latin typeface="Cambria Math" panose="02040503050406030204" pitchFamily="18" charset="0"/>
-                          </a:rPr>
-                          <m:t>𝑠𝑜𝑟𝑡</m:t>
-                        </m:r>
-                      </m:sub>
-                    </m:sSub>
-                  </m:oMath>
-                </a14:m>
-                <a:r>
-                  <a:rPr sz="1000" b="0" i="0" baseline="0" dirty="0">
-                    <a:latin typeface="Calibri"/>
-                  </a:rPr>
-                  <a:t> is realized sorting — not the generative homophily knob </a:t>
-                </a:r>
-                <a14:m>
-                  <m:oMath xmlns:m="http://schemas.openxmlformats.org/officeDocument/2006/math">
-                    <m:r>
-                      <a:rPr lang="en-US" sz="1000" b="0" i="0" baseline="0" dirty="0" smtClean="0">
-                        <a:latin typeface="Cambria Math" panose="02040503050406030204" pitchFamily="18" charset="0"/>
-                      </a:rPr>
-                      <m:t>𝜌</m:t>
-                    </m:r>
-                  </m:oMath>
-                </a14:m>
-                <a:r>
-                  <a:rPr sz="1000" b="0" i="0" baseline="0" dirty="0">
-                    <a:latin typeface="Calibri"/>
-                  </a:rPr>
-                  <a:t>.</a:t>
-                </a:r>
-              </a:p>
-              <a:p>
-                <a:pPr>
-                  <a:buChar char="•"/>
-                </a:pPr>
-                <a:r>
-                  <a:rPr sz="1000" b="0" i="0" baseline="0" dirty="0">
-                    <a:latin typeface="Calibri"/>
-                  </a:rPr>
-                  <a:t>  Figure: small multiples — blue sim curve, red empirical line, green </a:t>
-                </a:r>
-                <a14:m>
-                  <m:oMath xmlns:m="http://schemas.openxmlformats.org/officeDocument/2006/math">
-                    <m:sSup>
-                      <m:sSupPr>
-                        <m:ctrlPr>
-                          <a:rPr lang="en-US" sz="1000" b="0" i="0" baseline="0" dirty="0">
-                            <a:latin typeface="Cambria Math" panose="02040503050406030204" pitchFamily="18" charset="0"/>
-                          </a:rPr>
-                        </m:ctrlPr>
-                      </m:sSupPr>
-                      <m:e>
-                        <m:r>
-                          <a:rPr lang="en-US" sz="1000" b="0" i="0" baseline="0" dirty="0">
-                            <a:latin typeface="Cambria Math" panose="02040503050406030204" pitchFamily="18" charset="0"/>
-                          </a:rPr>
-                          <m:t>𝜌</m:t>
-                        </m:r>
-                      </m:e>
-                      <m:sup>
-                        <m:r>
-                          <a:rPr lang="en-US" sz="1000" b="0" i="0" baseline="0" dirty="0">
-                            <a:latin typeface="Cambria Math" panose="02040503050406030204" pitchFamily="18" charset="0"/>
-                          </a:rPr>
-                          <m:t>∗</m:t>
-                        </m:r>
-                      </m:sup>
-                    </m:sSup>
-                  </m:oMath>
-                </a14:m>
-                <a:r>
-                  <a:rPr sz="1000" b="0" i="0" baseline="0" dirty="0">
-                    <a:latin typeface="Calibri"/>
-                  </a:rPr>
-                  <a:t> (x-axis zoomed to evaluated bracket).</a:t>
-                </a:r>
-              </a:p>
-            </p:txBody>
-          </p:sp>
-        </mc:Choice>
-        <mc:Fallback>
-          <p:sp>
-            <p:nvSpPr>
-              <p:cNvPr id="5" name="TextBox 4"/>
-              <p:cNvSpPr txBox="1">
-                <a:spLocks noRot="1" noChangeAspect="1" noMove="1" noResize="1" noEditPoints="1" noAdjustHandles="1" noChangeArrowheads="1" noChangeShapeType="1" noTextEdit="1"/>
-              </p:cNvSpPr>
-              <p:nvPr/>
-            </p:nvSpPr>
-            <p:spPr>
-              <a:xfrm>
-                <a:off x="283932" y="1199867"/>
-                <a:ext cx="4147904" cy="4481291"/>
-              </a:xfrm>
-              <a:prstGeom prst="rect">
-                <a:avLst/>
-              </a:prstGeom>
-              <a:blipFill>
-                <a:blip r:embed="rId5"/>
-                <a:stretch>
-                  <a:fillRect t="-282"/>
-                </a:stretch>
-              </a:blipFill>
-            </p:spPr>
-            <p:txBody>
-              <a:bodyPr/>
-              <a:lstStyle/>
-              <a:p>
-                <a:r>
-                  <a:rPr lang="en-US">
-                    <a:noFill/>
-                  </a:rPr>
-                  <a:t> </a:t>
-                </a:r>
-              </a:p>
-            </p:txBody>
-          </p:sp>
-        </mc:Fallback>
-      </mc:AlternateContent>
-      <mc:AlternateContent xmlns:mc="http://schemas.openxmlformats.org/markup-compatibility/2006">
-        <mc:Choice xmlns:a14="http://schemas.microsoft.com/office/drawing/2010/main" Requires="a14">
-          <p:sp>
-            <p:nvSpPr>
-              <p:cNvPr id="6" name="TextBox 5"/>
-              <p:cNvSpPr txBox="1"/>
-              <p:nvPr/>
-            </p:nvSpPr>
-            <p:spPr>
-              <a:xfrm>
-                <a:off x="384048" y="6166786"/>
-                <a:ext cx="11423599" cy="430887"/>
-              </a:xfrm>
-              <a:prstGeom prst="rect">
-                <a:avLst/>
-              </a:prstGeom>
-              <a:noFill/>
-            </p:spPr>
-            <p:txBody>
-              <a:bodyPr wrap="square">
-                <a:spAutoFit/>
-              </a:bodyPr>
-              <a:lstStyle/>
-              <a:p>
-                <a:pPr algn="l"/>
-                <a:r>
-                  <a:rPr sz="1100" b="1" i="0" baseline="0" dirty="0">
-                    <a:latin typeface="Calibri"/>
-                  </a:rPr>
-                  <a:t>Claim (Alex): Hero panel — LG ASSIGN </a:t>
-                </a:r>
-                <a14:m>
-                  <m:oMath xmlns:m="http://schemas.openxmlformats.org/officeDocument/2006/math">
-                    <m:sSup>
-                      <m:sSupPr>
-                        <m:ctrlPr>
-                          <a:rPr lang="en-US" sz="1100" b="1" i="0" baseline="0" dirty="0">
-                            <a:latin typeface="Cambria Math" panose="02040503050406030204" pitchFamily="18" charset="0"/>
-                          </a:rPr>
-                        </m:ctrlPr>
-                      </m:sSupPr>
-                      <m:e>
-                        <m:r>
-                          <a:rPr lang="en-US" sz="1100" b="1" i="0" baseline="0" dirty="0">
-                            <a:latin typeface="Cambria Math" panose="02040503050406030204" pitchFamily="18" charset="0"/>
-                          </a:rPr>
-                          <m:t>𝜌</m:t>
-                        </m:r>
-                      </m:e>
-                      <m:sup>
-                        <m:r>
-                          <a:rPr lang="en-US" sz="1100" b="1" i="0" baseline="0" dirty="0">
-                            <a:latin typeface="Cambria Math" panose="02040503050406030204" pitchFamily="18" charset="0"/>
-                          </a:rPr>
-                          <m:t>∗</m:t>
-                        </m:r>
-                      </m:sup>
-                    </m:sSup>
-                    <m:r>
-                      <a:rPr lang="en-US" sz="1100" b="1" i="0" baseline="0" dirty="0">
-                        <a:latin typeface="Cambria Math" panose="02040503050406030204" pitchFamily="18" charset="0"/>
-                      </a:rPr>
-                      <m:t>=0</m:t>
-                    </m:r>
-                  </m:oMath>
-                </a14:m>
-                <a:r>
-                  <a:rPr sz="1100" b="1" i="0" baseline="0" dirty="0">
-                    <a:latin typeface="Calibri"/>
-                  </a:rPr>
-                  <a:t> matches modest empirical </a:t>
-                </a:r>
-                <a14:m>
-                  <m:oMath xmlns:m="http://schemas.openxmlformats.org/officeDocument/2006/math">
-                    <m:sSub>
-                      <m:sSubPr>
-                        <m:ctrlPr>
-                          <a:rPr lang="en-US" sz="1100" b="1" i="0" baseline="0" dirty="0">
-                            <a:latin typeface="Cambria Math" panose="02040503050406030204" pitchFamily="18" charset="0"/>
-                          </a:rPr>
-                        </m:ctrlPr>
-                      </m:sSubPr>
-                      <m:e>
-                        <m:r>
-                          <a:rPr lang="en-US" sz="1100" b="1" i="0" baseline="0" dirty="0">
-                            <a:latin typeface="Cambria Math" panose="02040503050406030204" pitchFamily="18" charset="0"/>
-                          </a:rPr>
-                          <m:t>𝐻</m:t>
-                        </m:r>
-                      </m:e>
-                      <m:sub>
-                        <m:r>
-                          <m:rPr>
-                            <m:sty m:val="p"/>
-                          </m:rPr>
-                          <a:rPr lang="en-US" sz="1100" b="1" i="0" baseline="0" dirty="0">
-                            <a:latin typeface="Cambria Math" panose="02040503050406030204" pitchFamily="18" charset="0"/>
-                          </a:rPr>
-                          <m:t>sort</m:t>
-                        </m:r>
-                      </m:sub>
-                    </m:sSub>
-                    <m:r>
-                      <a:rPr lang="en-US" sz="1100" b="1" i="0" baseline="0" dirty="0">
-                        <a:latin typeface="Cambria Math" panose="02040503050406030204" pitchFamily="18" charset="0"/>
-                      </a:rPr>
-                      <m:t>≈0.064</m:t>
-                    </m:r>
-                  </m:oMath>
-                </a14:m>
-                <a:r>
-                  <a:rPr sz="1100" b="1" i="0" baseline="0" dirty="0">
-                    <a:latin typeface="Calibri"/>
-                  </a:rPr>
-                  <a:t>; legacy </a:t>
-                </a:r>
-                <a14:m>
-                  <m:oMath xmlns:m="http://schemas.openxmlformats.org/officeDocument/2006/math">
-                    <m:r>
-                      <a:rPr lang="en-US" sz="1100" b="1" i="0" baseline="0" dirty="0" smtClean="0">
-                        <a:latin typeface="Cambria Math" panose="02040503050406030204" pitchFamily="18" charset="0"/>
-                      </a:rPr>
-                      <m:t>𝜌</m:t>
-                    </m:r>
-                    <m:r>
-                      <a:rPr lang="en-US" sz="1100" b="1" i="0" baseline="0" dirty="0" smtClean="0">
-                        <a:latin typeface="Cambria Math" panose="02040503050406030204" pitchFamily="18" charset="0"/>
-                      </a:rPr>
-                      <m:t>=0.5</m:t>
-                    </m:r>
-                  </m:oMath>
-                </a14:m>
-                <a:r>
-                  <a:rPr sz="1100" b="1" i="0" baseline="0" dirty="0">
-                    <a:latin typeface="Calibri"/>
-                  </a:rPr>
-                  <a:t> overshoots (</a:t>
-                </a:r>
-                <a14:m>
-                  <m:oMath xmlns:m="http://schemas.openxmlformats.org/officeDocument/2006/math">
-                    <m:r>
-                      <a:rPr lang="en-US" sz="1100" b="1" i="0" baseline="0" dirty="0" smtClean="0">
-                        <a:latin typeface="Cambria Math" panose="02040503050406030204" pitchFamily="18" charset="0"/>
-                      </a:rPr>
-                      <m:t>0.11</m:t>
-                    </m:r>
-                  </m:oMath>
-                </a14:m>
-                <a:r>
-                  <a:rPr sz="1100" b="1" i="0" baseline="0" dirty="0">
-                    <a:latin typeface="Calibri"/>
-                  </a:rPr>
-                  <a:t> mean </a:t>
-                </a:r>
-                <a14:m>
-                  <m:oMath xmlns:m="http://schemas.openxmlformats.org/officeDocument/2006/math">
-                    <m:d>
-                      <m:dPr>
-                        <m:begChr m:val="|"/>
-                        <m:endChr m:val="|"/>
-                        <m:ctrlPr>
-                          <a:rPr lang="en-US" sz="1100" b="1" i="0" baseline="0" dirty="0">
-                            <a:latin typeface="Cambria Math" panose="02040503050406030204" pitchFamily="18" charset="0"/>
-                          </a:rPr>
-                        </m:ctrlPr>
-                      </m:dPr>
-                      <m:e>
-                        <m:r>
-                          <a:rPr lang="en-US" sz="1100" b="1" i="0" baseline="0" dirty="0">
-                            <a:latin typeface="Cambria Math" panose="02040503050406030204" pitchFamily="18" charset="0"/>
-                          </a:rPr>
-                          <m:t>𝑒𝑟𝑟𝑜𝑟</m:t>
-                        </m:r>
-                      </m:e>
-                    </m:d>
-                  </m:oMath>
-                </a14:m>
-                <a:r>
-                  <a:rPr sz="1100" b="1" i="0" baseline="0" dirty="0">
-                    <a:latin typeface="Calibri"/>
-                  </a:rPr>
-                  <a:t>). Model–measurement fit on this panel — not a claim that NCAA rosters are random.</a:t>
-                </a:r>
-              </a:p>
-            </p:txBody>
-          </p:sp>
-        </mc:Choice>
-        <mc:Fallback>
-          <p:sp>
-            <p:nvSpPr>
-              <p:cNvPr id="6" name="TextBox 5"/>
-              <p:cNvSpPr txBox="1">
-                <a:spLocks noRot="1" noChangeAspect="1" noMove="1" noResize="1" noEditPoints="1" noAdjustHandles="1" noChangeArrowheads="1" noChangeShapeType="1" noTextEdit="1"/>
-              </p:cNvSpPr>
-              <p:nvPr/>
-            </p:nvSpPr>
-            <p:spPr>
-              <a:xfrm>
-                <a:off x="384048" y="6166786"/>
-                <a:ext cx="11423599" cy="430887"/>
-              </a:xfrm>
-              <a:prstGeom prst="rect">
-                <a:avLst/>
-              </a:prstGeom>
-              <a:blipFill>
-                <a:blip r:embed="rId6"/>
-                <a:stretch>
-                  <a:fillRect b="-5714"/>
-                </a:stretch>
-              </a:blipFill>
-            </p:spPr>
-            <p:txBody>
-              <a:bodyPr/>
-              <a:lstStyle/>
-              <a:p>
-                <a:r>
-                  <a:rPr lang="en-US">
-                    <a:noFill/>
-                  </a:rPr>
-                  <a:t> </a:t>
-                </a:r>
-              </a:p>
-            </p:txBody>
-          </p:sp>
-        </mc:Fallback>
-      </mc:AlternateContent>
+      <p:sp>
+        <p:nvSpPr>
+          <p:cNvPr id="5" name="TextBox 4"/>
+          <p:cNvSpPr txBox="1"/>
+          <p:nvPr/>
+        </p:nvSpPr>
+        <p:spPr>
+          <a:xfrm>
+            <a:off x="384048" y="3849624"/>
+            <a:ext cx="3794760" cy="2148840"/>
+          </a:xfrm>
+          <a:prstGeom prst="rect">
+            <a:avLst/>
+          </a:prstGeom>
+          <a:noFill/>
+        </p:spPr>
+        <p:txBody>
+          <a:bodyPr wrap="square">
+            <a:spAutoFit/>
+          </a:bodyPr>
+          <a:lstStyle/>
+          <a:p>
+            <a:pPr>
+              <a:buChar char="•"/>
+              <a:lnSpc>
+                <a:spcPct val="150000"/>
+              </a:lnSpc>
+              <a:spcBef>
+                <a:spcPts val="0"/>
+              </a:spcBef>
+              <a:spcAft>
+                <a:spcPts val="0"/>
+              </a:spcAft>
+            </a:pPr>
+            <a:r>
+              <a:rPr sz="1000" b="0" i="0" baseline="0">
+                <a:latin typeface="Calibri"/>
+              </a:rPr>
+              <a:t>  PD21 locked calibration (Aug 2026): bracket search on hero panel for Alex ASSIGN $\rho$.</a:t>
+            </a:r>
+          </a:p>
+          <a:p>
+            <a:pPr>
+              <a:buChar char="•"/>
+              <a:lnSpc>
+                <a:spcPct val="150000"/>
+              </a:lnSpc>
+              <a:spcBef>
+                <a:spcPts val="0"/>
+              </a:spcBef>
+              <a:spcAft>
+                <a:spcPts val="0"/>
+              </a:spcAft>
+            </a:pPr>
+            <a:r>
+              <a:rPr sz="1000" b="0" i="0" baseline="0">
+                <a:latin typeface="Calibri"/>
+              </a:rPr>
+              <a:t>  Alex (Aug 2026): calibrate ASSIGN $\rho$ so LG simulated $H_{\mathrm{sort}}$ matches empirical NCAA; formal $\rho$ MLE parked.</a:t>
+            </a:r>
+          </a:p>
+          <a:p>
+            <a:pPr>
+              <a:buChar char="•"/>
+              <a:lnSpc>
+                <a:spcPct val="150000"/>
+              </a:lnSpc>
+              <a:spcBef>
+                <a:spcPts val="0"/>
+              </a:spcBef>
+              <a:spcAft>
+                <a:spcPts val="0"/>
+              </a:spcAft>
+            </a:pPr>
+            <a:r>
+              <a:rPr sz="1000" b="0" i="0" baseline="0">
+                <a:latin typeface="Calibri"/>
+              </a:rPr>
+              <a:t>  Panel: 2011–2021 MBB · min$\geq20$ min player-season drop · box QC at panel build · empirical roster caps · PPM z-scored within season.</a:t>
+            </a:r>
+          </a:p>
+          <a:p>
+            <a:pPr>
+              <a:buChar char="•"/>
+              <a:lnSpc>
+                <a:spcPct val="150000"/>
+              </a:lnSpc>
+              <a:spcBef>
+                <a:spcPts val="0"/>
+              </a:spcBef>
+              <a:spcAft>
+                <a:spcPts val="0"/>
+              </a:spcAft>
+            </a:pPr>
+            <a:r>
+              <a:rPr sz="1000" b="0" i="0" baseline="0">
+                <a:latin typeface="Calibri"/>
+              </a:rPr>
+              <a:t>  Search: bracket + bisect (tol=0.001), 50 seeds/arm; $H_{\mathrm{sort}}^{\mathrm{sim}}$ monotone in $\rho$.</a:t>
+            </a:r>
+          </a:p>
+          <a:p>
+            <a:pPr>
+              <a:buChar char="•"/>
+              <a:lnSpc>
+                <a:spcPct val="150000"/>
+              </a:lnSpc>
+              <a:spcBef>
+                <a:spcPts val="0"/>
+              </a:spcBef>
+              <a:spcAft>
+                <a:spcPts val="0"/>
+              </a:spcAft>
+            </a:pPr>
+            <a:r>
+              <a:rPr sz="1000" b="0" i="0" baseline="0">
+                <a:latin typeface="Calibri"/>
+              </a:rPr>
+              <a:t>  H_{sort} = 1 - \sum_i(\hat{A}_i - \hat{\mu}_{g(i)})^2 / \sum_i(\hat{A}_i - \bar{A})^2 — realized sorting on a fixed partition.</a:t>
+            </a:r>
+          </a:p>
+          <a:p>
+            <a:pPr>
+              <a:buChar char="•"/>
+              <a:lnSpc>
+                <a:spcPct val="150000"/>
+              </a:lnSpc>
+              <a:spcBef>
+                <a:spcPts val="0"/>
+              </a:spcBef>
+              <a:spcAft>
+                <a:spcPts val="0"/>
+              </a:spcAft>
+            </a:pPr>
+            <a:r>
+              <a:rPr sz="1000" b="0" i="0" baseline="0">
+                <a:latin typeface="Calibri"/>
+              </a:rPr>
+              <a:t>  Longitudinal $\rho^* \approx 0$; mean $H_{\mathrm{sort}}^{\mathrm{sim}}$ at $\rho^*$ = 0.082; mean $H_{\mathrm{sort}}^{\mathrm{emp}}$ = 0.064.</a:t>
+            </a:r>
+          </a:p>
+          <a:p>
+            <a:pPr>
+              <a:buChar char="•"/>
+              <a:lnSpc>
+                <a:spcPct val="150000"/>
+              </a:lnSpc>
+              <a:spcBef>
+                <a:spcPts val="0"/>
+              </a:spcBef>
+              <a:spcAft>
+                <a:spcPts val="0"/>
+              </a:spcAft>
+            </a:pPr>
+            <a:r>
+              <a:rPr sz="1000" b="0" i="0" baseline="0">
+                <a:latin typeface="Calibri"/>
+              </a:rPr>
+              <a:t>  Per-season: 11/11 seasons at $\rho^*=0$; all at $\rho^*=0$.</a:t>
+            </a:r>
+          </a:p>
+          <a:p>
+            <a:pPr>
+              <a:buChar char="•"/>
+              <a:lnSpc>
+                <a:spcPct val="150000"/>
+              </a:lnSpc>
+              <a:spcBef>
+                <a:spcPts val="0"/>
+              </a:spcBef>
+              <a:spcAft>
+                <a:spcPts val="0"/>
+              </a:spcAft>
+            </a:pPr>
+            <a:r>
+              <a:rPr sz="1000" b="0" i="0" baseline="0">
+                <a:latin typeface="Calibri"/>
+              </a:rPr>
+              <a:t>  Legacy reference $\rho=0.5$: mean $|error| \approx 0.112$ vs $\approx 0.018$ at $\rho^*$.</a:t>
+            </a:r>
+          </a:p>
+          <a:p>
+            <a:pPr>
+              <a:buChar char="•"/>
+              <a:lnSpc>
+                <a:spcPct val="150000"/>
+              </a:lnSpc>
+              <a:spcBef>
+                <a:spcPts val="0"/>
+              </a:spcBef>
+              <a:spcAft>
+                <a:spcPts val="0"/>
+              </a:spcAft>
+            </a:pPr>
+            <a:r>
+              <a:rPr sz="1000" b="0" i="0" baseline="0">
+                <a:latin typeface="Calibri"/>
+              </a:rPr>
+              <a:t>  Figure bottom-right inset: per-season $\rho^*$ — flat at $0$ all seasons on hero panel.</a:t>
+            </a:r>
+          </a:p>
+          <a:p>
+            <a:pPr>
+              <a:buChar char="•"/>
+              <a:lnSpc>
+                <a:spcPct val="150000"/>
+              </a:lnSpc>
+              <a:spcBef>
+                <a:spcPts val="0"/>
+              </a:spcBef>
+              <a:spcAft>
+                <a:spcPts val="0"/>
+              </a:spcAft>
+            </a:pPr>
+            <a:r>
+              <a:rPr sz="1000" b="0" i="0" baseline="0">
+                <a:latin typeface="Calibri"/>
+              </a:rPr>
+              <a:t>  $\rho^*=0$ — what we DO say: on the locked hero panel, the LG ASSIGN homophily knob calibrates to zero (11/11 seasons); empirical $H_{\mathrm{sort}}\approx 0.064$ ($\approx 0.0642059$ on $[0,1]$ scale); sim at $\rho^*$ slightly high ($\approx 0.0821529$); turning $\rho$ up overshoots (see legacy $\rho=0.5$ bullet).</a:t>
+            </a:r>
+          </a:p>
+          <a:p>
+            <a:pPr>
+              <a:buChar char="•"/>
+              <a:lnSpc>
+                <a:spcPct val="150000"/>
+              </a:lnSpc>
+              <a:spcBef>
+                <a:spcPts val="0"/>
+              </a:spcBef>
+              <a:spcAft>
+                <a:spcPts val="0"/>
+              </a:spcAft>
+            </a:pPr>
+            <a:r>
+              <a:rPr sz="1000" b="0" i="0" baseline="0">
+                <a:latin typeface="Calibri"/>
+              </a:rPr>
+              <a:t>  $\rho^*=0$ — what we DO NOT say: NCAA has no team formation; Duke and a weak D-I school draw from the same talent pool; real-world assortativity is absent; Hero inverted-U / $\lambda$ / SELECT story is dead.</a:t>
+            </a:r>
+          </a:p>
+          <a:p>
+            <a:pPr>
+              <a:buChar char="•"/>
+              <a:lnSpc>
+                <a:spcPct val="150000"/>
+              </a:lnSpc>
+              <a:spcBef>
+                <a:spcPts val="0"/>
+              </a:spcBef>
+              <a:spcAft>
+                <a:spcPts val="0"/>
+              </a:spcAft>
+            </a:pPr>
+            <a:r>
+              <a:rPr sz="1000" b="0" i="0" baseline="0">
+                <a:latin typeface="Calibri"/>
+              </a:rPr>
+              <a:t>  $H_{{\mathrm{{sort}}}}$ is realized sorting on a fixed roster partition (VECTOR lock) — not the generative $\rho$ knob. Box QC lowered measured $H_{{\mathrm{{sort}}}}$ vs pre-QC ($\sim 0.10 \rightarrow \sim 0.06$); modest $\neq$ zero. Contrast: ppm0lt20 panel (HAND20 slide 15).</a:t>
+            </a:r>
+          </a:p>
+          <a:p>
+            <a:pPr>
+              <a:buChar char="•"/>
+              <a:lnSpc>
+                <a:spcPct val="150000"/>
+              </a:lnSpc>
+              <a:spcBef>
+                <a:spcPts val="0"/>
+              </a:spcBef>
+              <a:spcAft>
+                <a:spcPts val="0"/>
+              </a:spcAft>
+            </a:pPr>
+            <a:r>
+              <a:rPr sz="1000" b="0" i="0" baseline="0">
+                <a:latin typeface="Calibri"/>
+              </a:rPr>
+              <a:t>  VECTOR lock: H_{sort} is realized sorting — not the generative homophily knob \rho.</a:t>
+            </a:r>
+          </a:p>
+          <a:p>
+            <a:pPr>
+              <a:buChar char="•"/>
+              <a:lnSpc>
+                <a:spcPct val="150000"/>
+              </a:lnSpc>
+              <a:spcBef>
+                <a:spcPts val="0"/>
+              </a:spcBef>
+              <a:spcAft>
+                <a:spcPts val="0"/>
+              </a:spcAft>
+            </a:pPr>
+            <a:r>
+              <a:rPr sz="1000" b="0" i="0" baseline="0">
+                <a:latin typeface="Calibri"/>
+              </a:rPr>
+              <a:t>  Figure: small multiples — blue sim curve, red empirical line, green $\rho^*$ (x-axis zoomed to evaluated bracket).</a:t>
+            </a:r>
+          </a:p>
+        </p:txBody>
+      </p:sp>
+      <p:sp>
+        <p:nvSpPr>
+          <p:cNvPr id="6" name="TextBox 5"/>
+          <p:cNvSpPr txBox="1"/>
+          <p:nvPr/>
+        </p:nvSpPr>
+        <p:spPr>
+          <a:xfrm>
+            <a:off x="384048" y="6053328"/>
+            <a:ext cx="11423599" cy="420624"/>
+          </a:xfrm>
+          <a:prstGeom prst="rect">
+            <a:avLst/>
+          </a:prstGeom>
+          <a:noFill/>
+        </p:spPr>
+        <p:txBody>
+          <a:bodyPr wrap="square">
+            <a:spAutoFit/>
+          </a:bodyPr>
+          <a:lstStyle/>
+          <a:p>
+            <a:pPr algn="l"/>
+            <a:r>
+              <a:rPr sz="1100" b="1" i="0" baseline="0">
+                <a:latin typeface="Calibri"/>
+              </a:rPr>
+              <a:t>Claim (Alex): Hero panel — LG ASSIGN $\rho^*=0$ matches modest empirical $H_{\mathrm{sort}}\approx0.064$; legacy $\rho=0.5$ overshoots ($0.11$ mean $|error|$). Model–measurement fit on this panel — not a claim that NCAA rosters are random.</a:t>
+            </a:r>
+          </a:p>
+        </p:txBody>
+      </p:sp>
     </p:spTree>
   </p:cSld>
   <p:clrMapOvr>
